--- a/public/lessons/year-6-maths/autumn/week-5/reason-with-number-properties/teaching-powerpoint-v1.pptx
+++ b/public/lessons/year-6-maths/autumn/week-5/reason-with-number-properties/teaching-powerpoint-v1.pptx
@@ -2,24 +2,24 @@
 <file path=ppt/presentation.xml><?xml version="1.0" encoding="utf-8"?>
 <p:presentation xmlns:p="http://schemas.openxmlformats.org/presentationml/2006/main">
   <p:sldMasterIdLst>
-    <p:sldMasterId xmlns:r="http://schemas.openxmlformats.org/officeDocument/2006/relationships" id="2147483648" r:id="R2e6d90bd32084199"/>
+    <p:sldMasterId xmlns:r="http://schemas.openxmlformats.org/officeDocument/2006/relationships" id="2147483648" r:id="R31fe06b6f0f749b8"/>
   </p:sldMasterIdLst>
   <p:notesMasterIdLst>
-    <p:notesMasterId xmlns:r="http://schemas.openxmlformats.org/officeDocument/2006/relationships" r:id="R39d48f7dfd294ee1"/>
+    <p:notesMasterId xmlns:r="http://schemas.openxmlformats.org/officeDocument/2006/relationships" r:id="R9a13c55b590d4d6e"/>
   </p:notesMasterIdLst>
   <p:sldIdLst>
-    <p:sldId xmlns:r="http://schemas.openxmlformats.org/officeDocument/2006/relationships" id="256" r:id="Rcb34d628da884c70"/>
-    <p:sldId xmlns:r="http://schemas.openxmlformats.org/officeDocument/2006/relationships" id="257" r:id="Ree7713c4a5404633"/>
-    <p:sldId xmlns:r="http://schemas.openxmlformats.org/officeDocument/2006/relationships" id="258" r:id="Rf9122a4d21264edf"/>
-    <p:sldId xmlns:r="http://schemas.openxmlformats.org/officeDocument/2006/relationships" id="259" r:id="Re40f46475ac44a39"/>
-    <p:sldId xmlns:r="http://schemas.openxmlformats.org/officeDocument/2006/relationships" id="260" r:id="R567c66209b194a3e"/>
-    <p:sldId xmlns:r="http://schemas.openxmlformats.org/officeDocument/2006/relationships" id="261" r:id="Rfa8523e8aa694fc1"/>
-    <p:sldId xmlns:r="http://schemas.openxmlformats.org/officeDocument/2006/relationships" id="262" r:id="R7d7c9abd0d724caf"/>
-    <p:sldId xmlns:r="http://schemas.openxmlformats.org/officeDocument/2006/relationships" id="263" r:id="Rcc15f9f5c906434e"/>
-    <p:sldId xmlns:r="http://schemas.openxmlformats.org/officeDocument/2006/relationships" id="264" r:id="R760e1f39ac534056"/>
-    <p:sldId xmlns:r="http://schemas.openxmlformats.org/officeDocument/2006/relationships" id="265" r:id="R9a31ba0878b248fc"/>
-    <p:sldId xmlns:r="http://schemas.openxmlformats.org/officeDocument/2006/relationships" id="266" r:id="Ra0ebb269b6894f6b"/>
-    <p:sldId xmlns:r="http://schemas.openxmlformats.org/officeDocument/2006/relationships" id="267" r:id="R0e7e3700eaaa436e"/>
+    <p:sldId xmlns:r="http://schemas.openxmlformats.org/officeDocument/2006/relationships" id="256" r:id="R88a8cff170d44877"/>
+    <p:sldId xmlns:r="http://schemas.openxmlformats.org/officeDocument/2006/relationships" id="257" r:id="Rf0df421007ee43b5"/>
+    <p:sldId xmlns:r="http://schemas.openxmlformats.org/officeDocument/2006/relationships" id="258" r:id="Rec513aa561f5427b"/>
+    <p:sldId xmlns:r="http://schemas.openxmlformats.org/officeDocument/2006/relationships" id="259" r:id="Rd9451fe7d9a943c3"/>
+    <p:sldId xmlns:r="http://schemas.openxmlformats.org/officeDocument/2006/relationships" id="260" r:id="R4ffab4eeebc34638"/>
+    <p:sldId xmlns:r="http://schemas.openxmlformats.org/officeDocument/2006/relationships" id="261" r:id="R1f8f377b91b648b1"/>
+    <p:sldId xmlns:r="http://schemas.openxmlformats.org/officeDocument/2006/relationships" id="262" r:id="R0697f3ab31024428"/>
+    <p:sldId xmlns:r="http://schemas.openxmlformats.org/officeDocument/2006/relationships" id="263" r:id="R303b60957f7d40b2"/>
+    <p:sldId xmlns:r="http://schemas.openxmlformats.org/officeDocument/2006/relationships" id="264" r:id="R7f08a22dc7de409e"/>
+    <p:sldId xmlns:r="http://schemas.openxmlformats.org/officeDocument/2006/relationships" id="265" r:id="R48b4fd2e8c314383"/>
+    <p:sldId xmlns:r="http://schemas.openxmlformats.org/officeDocument/2006/relationships" id="266" r:id="R882eaecb4e384eb7"/>
+    <p:sldId xmlns:r="http://schemas.openxmlformats.org/officeDocument/2006/relationships" id="267" r:id="R3da03f4b52e742d1"/>
   </p:sldIdLst>
   <p:sldSz cx="12192000" cy="6858000"/>
   <p:notesSz cx="6858000" cy="9144000"/>
@@ -873,7 +873,7 @@
           <a:lstStyle xmlns:a="http://schemas.openxmlformats.org/drawingml/2006/main"/>
           <a:p xmlns:a="http://schemas.openxmlformats.org/drawingml/2006/main">
             <a:r>
-              <a:t>I do. Reveal the question, setup and each calculation stage one click at a time. Pupils watch before copying. Model answer: 72.</a:t>
+              <a:t>I do. Reveal the question, then reveal each mathematical change one click at a time. Point to the numbers and operation that changed before moving to the next line. Final answer: 72.</a:t>
             </a:r>
           </a:p>
         </p:txBody>
@@ -1291,7 +1291,7 @@
   </p:cSld>
   <p:clrMap bg1="lt1" tx1="dk1" bg2="lt2" tx2="dk2" accent1="accent1" accent2="accent2" accent3="accent3" accent4="accent4" accent5="accent5" accent6="accent6" hlink="hlink" folHlink="folHlink"/>
   <p:sldLayoutIdLst>
-    <p:sldLayoutId xmlns:r="http://schemas.openxmlformats.org/officeDocument/2006/relationships" id="2147483649" r:id="Re0f9a095bfde4955"/>
+    <p:sldLayoutId xmlns:r="http://schemas.openxmlformats.org/officeDocument/2006/relationships" id="2147483649" r:id="Rf58b3e26ce0f4363"/>
   </p:sldLayoutIdLst>
   <p:txStyles>
     <p:titleStyle>
@@ -1842,7 +1842,7 @@
           <p:cNvPr id="12" name="">
             <a:extLst xmlns:a="http://schemas.openxmlformats.org/drawingml/2006/main">
               <a:ext uri="{FF2B5EF4-FFF2-40B4-BE49-F238E27FC236}">
-                <a16:creationId xmlns:a16="http://schemas.microsoft.com/office/drawing/2014/main" id="{D2769180-D9B0-460B-BE5F-E9D2EDD9925B}"/>
+                <a16:creationId xmlns:a16="http://schemas.microsoft.com/office/drawing/2014/main" id="{766A2138-9B9B-48CB-906B-783BFA9B37CD}"/>
               </a:ext>
             </a:extLst>
           </p:cNvPr>
@@ -1874,7 +1874,7 @@
           <p:cNvPr id="2" name="">
             <a:extLst xmlns:a="http://schemas.openxmlformats.org/drawingml/2006/main">
               <a:ext uri="{FF2B5EF4-FFF2-40B4-BE49-F238E27FC236}">
-                <a16:creationId xmlns:a16="http://schemas.microsoft.com/office/drawing/2014/main" id="{17B91521-CD84-498E-A8F3-01C21FFD6E17}"/>
+                <a16:creationId xmlns:a16="http://schemas.microsoft.com/office/drawing/2014/main" id="{DD5F7116-1CE0-4C2A-BAB2-FC990B81FA1E}"/>
               </a:ext>
             </a:extLst>
           </p:cNvPr>
@@ -1931,7 +1931,7 @@
           <p:cNvPr id="3" name="">
             <a:extLst xmlns:a="http://schemas.openxmlformats.org/drawingml/2006/main">
               <a:ext uri="{FF2B5EF4-FFF2-40B4-BE49-F238E27FC236}">
-                <a16:creationId xmlns:a16="http://schemas.microsoft.com/office/drawing/2014/main" id="{5024FC02-AF6F-4620-BF9C-FF1E4C233E9C}"/>
+                <a16:creationId xmlns:a16="http://schemas.microsoft.com/office/drawing/2014/main" id="{A932124D-AFFF-4E42-B1CF-F56C8FC9C269}"/>
               </a:ext>
             </a:extLst>
           </p:cNvPr>
@@ -1965,7 +1965,7 @@
           <p:cNvPr id="4" name="">
             <a:extLst xmlns:a="http://schemas.openxmlformats.org/drawingml/2006/main">
               <a:ext uri="{FF2B5EF4-FFF2-40B4-BE49-F238E27FC236}">
-                <a16:creationId xmlns:a16="http://schemas.microsoft.com/office/drawing/2014/main" id="{4A50880A-72DD-4F9A-9526-D99A31CE3482}"/>
+                <a16:creationId xmlns:a16="http://schemas.microsoft.com/office/drawing/2014/main" id="{213B3E37-4E2D-45F6-BE22-A4CED64E5A08}"/>
               </a:ext>
             </a:extLst>
           </p:cNvPr>
@@ -2022,7 +2022,7 @@
           <p:cNvPr id="5" name="">
             <a:extLst xmlns:a="http://schemas.openxmlformats.org/drawingml/2006/main">
               <a:ext uri="{FF2B5EF4-FFF2-40B4-BE49-F238E27FC236}">
-                <a16:creationId xmlns:a16="http://schemas.microsoft.com/office/drawing/2014/main" id="{E7770B0E-3BF4-4F84-9210-C1812EA7D450}"/>
+                <a16:creationId xmlns:a16="http://schemas.microsoft.com/office/drawing/2014/main" id="{CC4D3A2D-602F-4B49-A88D-E66B8212E4B9}"/>
               </a:ext>
             </a:extLst>
           </p:cNvPr>
@@ -2079,7 +2079,7 @@
           <p:cNvPr id="6" name="">
             <a:extLst xmlns:a="http://schemas.openxmlformats.org/drawingml/2006/main">
               <a:ext uri="{FF2B5EF4-FFF2-40B4-BE49-F238E27FC236}">
-                <a16:creationId xmlns:a16="http://schemas.microsoft.com/office/drawing/2014/main" id="{F85B4B58-C8BB-4658-AC5E-9A9BFE6A6951}"/>
+                <a16:creationId xmlns:a16="http://schemas.microsoft.com/office/drawing/2014/main" id="{FEAEA5A9-3D9D-4955-84E5-97CB17BEBDED}"/>
               </a:ext>
             </a:extLst>
           </p:cNvPr>
@@ -2113,7 +2113,7 @@
           <p:cNvPr id="7" name="">
             <a:extLst xmlns:a="http://schemas.openxmlformats.org/drawingml/2006/main">
               <a:ext uri="{FF2B5EF4-FFF2-40B4-BE49-F238E27FC236}">
-                <a16:creationId xmlns:a16="http://schemas.microsoft.com/office/drawing/2014/main" id="{2C1BCFF9-9C7B-4050-97E4-665A1E62EE1E}"/>
+                <a16:creationId xmlns:a16="http://schemas.microsoft.com/office/drawing/2014/main" id="{E483A945-5AE4-48B7-BA93-62B01474607F}"/>
               </a:ext>
             </a:extLst>
           </p:cNvPr>
@@ -2170,7 +2170,7 @@
           <p:cNvPr id="8" name="">
             <a:extLst xmlns:a="http://schemas.openxmlformats.org/drawingml/2006/main">
               <a:ext uri="{FF2B5EF4-FFF2-40B4-BE49-F238E27FC236}">
-                <a16:creationId xmlns:a16="http://schemas.microsoft.com/office/drawing/2014/main" id="{AEAEA2B7-D84E-4A7F-A19E-DA749D6A5A60}"/>
+                <a16:creationId xmlns:a16="http://schemas.microsoft.com/office/drawing/2014/main" id="{FBA260F9-14F2-410A-ABA8-7C7592E3CE7C}"/>
               </a:ext>
             </a:extLst>
           </p:cNvPr>
@@ -2227,7 +2227,7 @@
           <p:cNvPr id="9" name="">
             <a:extLst xmlns:a="http://schemas.openxmlformats.org/drawingml/2006/main">
               <a:ext uri="{FF2B5EF4-FFF2-40B4-BE49-F238E27FC236}">
-                <a16:creationId xmlns:a16="http://schemas.microsoft.com/office/drawing/2014/main" id="{9DEA2278-6F3F-4BF8-B76C-6B05F08F4F2F}"/>
+                <a16:creationId xmlns:a16="http://schemas.microsoft.com/office/drawing/2014/main" id="{AE1EB0B3-FA45-4631-BFA0-F4AA24FDD87A}"/>
               </a:ext>
             </a:extLst>
           </p:cNvPr>
@@ -2284,7 +2284,7 @@
           <p:cNvPr id="10" name="">
             <a:extLst xmlns:a="http://schemas.openxmlformats.org/drawingml/2006/main">
               <a:ext uri="{FF2B5EF4-FFF2-40B4-BE49-F238E27FC236}">
-                <a16:creationId xmlns:a16="http://schemas.microsoft.com/office/drawing/2014/main" id="{FA0A6354-63FF-4AF7-BC89-5CD53CCF9539}"/>
+                <a16:creationId xmlns:a16="http://schemas.microsoft.com/office/drawing/2014/main" id="{C657B3E8-B78F-4109-AB11-5181E8E13EFB}"/>
               </a:ext>
             </a:extLst>
           </p:cNvPr>
@@ -2341,7 +2341,7 @@
           <p:cNvPr id="11" name="">
             <a:extLst xmlns:a="http://schemas.openxmlformats.org/drawingml/2006/main">
               <a:ext uri="{FF2B5EF4-FFF2-40B4-BE49-F238E27FC236}">
-                <a16:creationId xmlns:a16="http://schemas.microsoft.com/office/drawing/2014/main" id="{81FBF8BF-1B35-4C14-B0B3-C7A1F4266562}"/>
+                <a16:creationId xmlns:a16="http://schemas.microsoft.com/office/drawing/2014/main" id="{99CA356D-D601-4988-8C4F-2A49F5C37055}"/>
               </a:ext>
             </a:extLst>
           </p:cNvPr>
@@ -2396,7 +2396,7 @@
     </p:spTree>
     <p:extLst>
       <p:ext uri="{BB962C8B-B14F-4D97-AF65-F5344CB8AC3E}">
-        <p14:creationId xmlns:p14="http://schemas.microsoft.com/office/powerpoint/2010/main" val="1550129695"/>
+        <p14:creationId xmlns:p14="http://schemas.microsoft.com/office/powerpoint/2010/main" val="856159652"/>
       </p:ext>
     </p:extLst>
   </p:cSld>
@@ -2427,7 +2427,7 @@
           <p:cNvPr id="14" name="">
             <a:extLst xmlns:a="http://schemas.openxmlformats.org/drawingml/2006/main">
               <a:ext uri="{FF2B5EF4-FFF2-40B4-BE49-F238E27FC236}">
-                <a16:creationId xmlns:a16="http://schemas.microsoft.com/office/drawing/2014/main" id="{1C086360-B8BE-4B52-9F82-DFB888C04FD8}"/>
+                <a16:creationId xmlns:a16="http://schemas.microsoft.com/office/drawing/2014/main" id="{10F74984-F4AD-43D7-94E0-FB817CF31E43}"/>
               </a:ext>
             </a:extLst>
           </p:cNvPr>
@@ -2459,7 +2459,7 @@
           <p:cNvPr id="2" name="">
             <a:extLst xmlns:a="http://schemas.openxmlformats.org/drawingml/2006/main">
               <a:ext uri="{FF2B5EF4-FFF2-40B4-BE49-F238E27FC236}">
-                <a16:creationId xmlns:a16="http://schemas.microsoft.com/office/drawing/2014/main" id="{CF2CDBA7-D129-42B9-A467-3659511F84C8}"/>
+                <a16:creationId xmlns:a16="http://schemas.microsoft.com/office/drawing/2014/main" id="{B51674A2-AD64-4F51-AE7D-5738DD39CD21}"/>
               </a:ext>
             </a:extLst>
           </p:cNvPr>
@@ -2516,7 +2516,7 @@
           <p:cNvPr id="3" name="">
             <a:extLst xmlns:a="http://schemas.openxmlformats.org/drawingml/2006/main">
               <a:ext uri="{FF2B5EF4-FFF2-40B4-BE49-F238E27FC236}">
-                <a16:creationId xmlns:a16="http://schemas.microsoft.com/office/drawing/2014/main" id="{A3BE37AC-F017-44F1-A15B-BC1BF306C045}"/>
+                <a16:creationId xmlns:a16="http://schemas.microsoft.com/office/drawing/2014/main" id="{7CB0EE1E-A8C7-47F2-A9B8-CF9419B79038}"/>
               </a:ext>
             </a:extLst>
           </p:cNvPr>
@@ -2548,7 +2548,7 @@
           <p:cNvPr id="4" name="">
             <a:extLst xmlns:a="http://schemas.openxmlformats.org/drawingml/2006/main">
               <a:ext uri="{FF2B5EF4-FFF2-40B4-BE49-F238E27FC236}">
-                <a16:creationId xmlns:a16="http://schemas.microsoft.com/office/drawing/2014/main" id="{890971CD-54BD-43DF-8639-B671B58EFCE0}"/>
+                <a16:creationId xmlns:a16="http://schemas.microsoft.com/office/drawing/2014/main" id="{3DB4AC17-1F53-4548-A3D3-675696401728}"/>
               </a:ext>
             </a:extLst>
           </p:cNvPr>
@@ -2605,7 +2605,7 @@
           <p:cNvPr id="5" name="">
             <a:extLst xmlns:a="http://schemas.openxmlformats.org/drawingml/2006/main">
               <a:ext uri="{FF2B5EF4-FFF2-40B4-BE49-F238E27FC236}">
-                <a16:creationId xmlns:a16="http://schemas.microsoft.com/office/drawing/2014/main" id="{EA76E3BB-DD34-4241-86F1-31BD31E90315}"/>
+                <a16:creationId xmlns:a16="http://schemas.microsoft.com/office/drawing/2014/main" id="{A02C66D6-EF21-472A-B11A-3D5E99585EF5}"/>
               </a:ext>
             </a:extLst>
           </p:cNvPr>
@@ -2662,7 +2662,7 @@
           <p:cNvPr id="6" name="">
             <a:extLst xmlns:a="http://schemas.openxmlformats.org/drawingml/2006/main">
               <a:ext uri="{FF2B5EF4-FFF2-40B4-BE49-F238E27FC236}">
-                <a16:creationId xmlns:a16="http://schemas.microsoft.com/office/drawing/2014/main" id="{030C0315-6626-4A54-B69E-B2C66305A9BB}"/>
+                <a16:creationId xmlns:a16="http://schemas.microsoft.com/office/drawing/2014/main" id="{A422E127-C72D-4833-9EB5-56543C50A527}"/>
               </a:ext>
             </a:extLst>
           </p:cNvPr>
@@ -2719,7 +2719,7 @@
           <p:cNvPr id="7" name="">
             <a:extLst xmlns:a="http://schemas.openxmlformats.org/drawingml/2006/main">
               <a:ext uri="{FF2B5EF4-FFF2-40B4-BE49-F238E27FC236}">
-                <a16:creationId xmlns:a16="http://schemas.microsoft.com/office/drawing/2014/main" id="{BBB08633-31F7-4FA2-9619-8CA76A0F4A83}"/>
+                <a16:creationId xmlns:a16="http://schemas.microsoft.com/office/drawing/2014/main" id="{E2EA6D3F-2E30-4263-A5BE-F9BFCF117FB7}"/>
               </a:ext>
             </a:extLst>
           </p:cNvPr>
@@ -2751,7 +2751,7 @@
           <p:cNvPr id="8" name="">
             <a:extLst xmlns:a="http://schemas.openxmlformats.org/drawingml/2006/main">
               <a:ext uri="{FF2B5EF4-FFF2-40B4-BE49-F238E27FC236}">
-                <a16:creationId xmlns:a16="http://schemas.microsoft.com/office/drawing/2014/main" id="{2E30F3CD-1A54-433A-99A0-D8344D9DCA89}"/>
+                <a16:creationId xmlns:a16="http://schemas.microsoft.com/office/drawing/2014/main" id="{34806272-1000-4A8B-9E8A-621B0A48E094}"/>
               </a:ext>
             </a:extLst>
           </p:cNvPr>
@@ -2808,7 +2808,7 @@
           <p:cNvPr id="9" name="">
             <a:extLst xmlns:a="http://schemas.openxmlformats.org/drawingml/2006/main">
               <a:ext uri="{FF2B5EF4-FFF2-40B4-BE49-F238E27FC236}">
-                <a16:creationId xmlns:a16="http://schemas.microsoft.com/office/drawing/2014/main" id="{7FE96B59-7500-4333-8DC5-4AA11B0DA093}"/>
+                <a16:creationId xmlns:a16="http://schemas.microsoft.com/office/drawing/2014/main" id="{BEC64477-D8BE-4358-BC71-791AA71FC1BE}"/>
               </a:ext>
             </a:extLst>
           </p:cNvPr>
@@ -2865,7 +2865,7 @@
           <p:cNvPr id="10" name="">
             <a:extLst xmlns:a="http://schemas.openxmlformats.org/drawingml/2006/main">
               <a:ext uri="{FF2B5EF4-FFF2-40B4-BE49-F238E27FC236}">
-                <a16:creationId xmlns:a16="http://schemas.microsoft.com/office/drawing/2014/main" id="{19D629FE-788C-4A67-95BF-E190407C0D58}"/>
+                <a16:creationId xmlns:a16="http://schemas.microsoft.com/office/drawing/2014/main" id="{A38A455E-2996-488C-9879-57677CE2DD82}"/>
               </a:ext>
             </a:extLst>
           </p:cNvPr>
@@ -2922,7 +2922,7 @@
           <p:cNvPr id="11" name="">
             <a:extLst xmlns:a="http://schemas.openxmlformats.org/drawingml/2006/main">
               <a:ext uri="{FF2B5EF4-FFF2-40B4-BE49-F238E27FC236}">
-                <a16:creationId xmlns:a16="http://schemas.microsoft.com/office/drawing/2014/main" id="{DA2ED455-F8AF-425A-B520-928E1384429D}"/>
+                <a16:creationId xmlns:a16="http://schemas.microsoft.com/office/drawing/2014/main" id="{0DAB1E9D-9AC0-4234-8D37-498CC1591B22}"/>
               </a:ext>
             </a:extLst>
           </p:cNvPr>
@@ -2979,7 +2979,7 @@
           <p:cNvPr id="12" name="">
             <a:extLst xmlns:a="http://schemas.openxmlformats.org/drawingml/2006/main">
               <a:ext uri="{FF2B5EF4-FFF2-40B4-BE49-F238E27FC236}">
-                <a16:creationId xmlns:a16="http://schemas.microsoft.com/office/drawing/2014/main" id="{5B80862A-76FD-4F14-A5A8-36BC4789D9E8}"/>
+                <a16:creationId xmlns:a16="http://schemas.microsoft.com/office/drawing/2014/main" id="{39950C16-D7ED-4440-8F5D-3B9AC939F243}"/>
               </a:ext>
             </a:extLst>
           </p:cNvPr>
@@ -3036,7 +3036,7 @@
           <p:cNvPr id="13" name="">
             <a:extLst xmlns:a="http://schemas.openxmlformats.org/drawingml/2006/main">
               <a:ext uri="{FF2B5EF4-FFF2-40B4-BE49-F238E27FC236}">
-                <a16:creationId xmlns:a16="http://schemas.microsoft.com/office/drawing/2014/main" id="{7709D1DF-438A-427E-BA6A-7849038F36CB}"/>
+                <a16:creationId xmlns:a16="http://schemas.microsoft.com/office/drawing/2014/main" id="{C5B33F87-9780-4F12-BDFF-0FF270D358F5}"/>
               </a:ext>
             </a:extLst>
           </p:cNvPr>
@@ -3091,7 +3091,7 @@
     </p:spTree>
     <p:extLst>
       <p:ext uri="{BB962C8B-B14F-4D97-AF65-F5344CB8AC3E}">
-        <p14:creationId xmlns:p14="http://schemas.microsoft.com/office/powerpoint/2010/main" val="367541799"/>
+        <p14:creationId xmlns:p14="http://schemas.microsoft.com/office/powerpoint/2010/main" val="19196613"/>
       </p:ext>
     </p:extLst>
   </p:cSld>
@@ -3292,7 +3292,7 @@
           <p:cNvPr id="19" name="">
             <a:extLst xmlns:a="http://schemas.openxmlformats.org/drawingml/2006/main">
               <a:ext uri="{FF2B5EF4-FFF2-40B4-BE49-F238E27FC236}">
-                <a16:creationId xmlns:a16="http://schemas.microsoft.com/office/drawing/2014/main" id="{20F20EF3-7A63-4E7D-A970-16B51FBAD6FA}"/>
+                <a16:creationId xmlns:a16="http://schemas.microsoft.com/office/drawing/2014/main" id="{0D9DC9E9-98D7-44B7-BA3E-734DD8EBE4C5}"/>
               </a:ext>
             </a:extLst>
           </p:cNvPr>
@@ -3324,7 +3324,7 @@
           <p:cNvPr id="2" name="">
             <a:extLst xmlns:a="http://schemas.openxmlformats.org/drawingml/2006/main">
               <a:ext uri="{FF2B5EF4-FFF2-40B4-BE49-F238E27FC236}">
-                <a16:creationId xmlns:a16="http://schemas.microsoft.com/office/drawing/2014/main" id="{944937F4-0F13-4379-B21A-0159ED0A9CE6}"/>
+                <a16:creationId xmlns:a16="http://schemas.microsoft.com/office/drawing/2014/main" id="{40E56A3E-945C-43C0-96C2-50559DFB6DA2}"/>
               </a:ext>
             </a:extLst>
           </p:cNvPr>
@@ -3381,7 +3381,7 @@
           <p:cNvPr id="3" name="">
             <a:extLst xmlns:a="http://schemas.openxmlformats.org/drawingml/2006/main">
               <a:ext uri="{FF2B5EF4-FFF2-40B4-BE49-F238E27FC236}">
-                <a16:creationId xmlns:a16="http://schemas.microsoft.com/office/drawing/2014/main" id="{6FFED1E4-8DD2-4548-A768-A0F3342A8E41}"/>
+                <a16:creationId xmlns:a16="http://schemas.microsoft.com/office/drawing/2014/main" id="{5871DC30-782A-4A7B-AABD-01B07A060F01}"/>
               </a:ext>
             </a:extLst>
           </p:cNvPr>
@@ -3413,7 +3413,7 @@
           <p:cNvPr id="4" name="">
             <a:extLst xmlns:a="http://schemas.openxmlformats.org/drawingml/2006/main">
               <a:ext uri="{FF2B5EF4-FFF2-40B4-BE49-F238E27FC236}">
-                <a16:creationId xmlns:a16="http://schemas.microsoft.com/office/drawing/2014/main" id="{5CBD277F-2EFB-40B4-8B55-46F4BF1F080B}"/>
+                <a16:creationId xmlns:a16="http://schemas.microsoft.com/office/drawing/2014/main" id="{1906FEC9-03C1-43FD-8082-6AC33801F3DC}"/>
               </a:ext>
             </a:extLst>
           </p:cNvPr>
@@ -3470,7 +3470,7 @@
           <p:cNvPr id="5" name="">
             <a:extLst xmlns:a="http://schemas.openxmlformats.org/drawingml/2006/main">
               <a:ext uri="{FF2B5EF4-FFF2-40B4-BE49-F238E27FC236}">
-                <a16:creationId xmlns:a16="http://schemas.microsoft.com/office/drawing/2014/main" id="{6218F801-BE69-4922-B08B-C6AB1C2E6011}"/>
+                <a16:creationId xmlns:a16="http://schemas.microsoft.com/office/drawing/2014/main" id="{7015932B-4B49-4EA5-9217-F6EF1E4CBB31}"/>
               </a:ext>
             </a:extLst>
           </p:cNvPr>
@@ -3527,7 +3527,7 @@
           <p:cNvPr id="6" name="">
             <a:extLst xmlns:a="http://schemas.openxmlformats.org/drawingml/2006/main">
               <a:ext uri="{FF2B5EF4-FFF2-40B4-BE49-F238E27FC236}">
-                <a16:creationId xmlns:a16="http://schemas.microsoft.com/office/drawing/2014/main" id="{39D10B7F-59A2-4524-9121-EFB15D20EE55}"/>
+                <a16:creationId xmlns:a16="http://schemas.microsoft.com/office/drawing/2014/main" id="{C1A2DA75-7F19-473A-9867-06C48A8FC532}"/>
               </a:ext>
             </a:extLst>
           </p:cNvPr>
@@ -3584,7 +3584,7 @@
           <p:cNvPr id="7" name="">
             <a:extLst xmlns:a="http://schemas.openxmlformats.org/drawingml/2006/main">
               <a:ext uri="{FF2B5EF4-FFF2-40B4-BE49-F238E27FC236}">
-                <a16:creationId xmlns:a16="http://schemas.microsoft.com/office/drawing/2014/main" id="{464233E4-348B-456A-B521-8E240E37F65F}"/>
+                <a16:creationId xmlns:a16="http://schemas.microsoft.com/office/drawing/2014/main" id="{9AF3352E-9D08-42C9-9F5C-1EC101FE6401}"/>
               </a:ext>
             </a:extLst>
           </p:cNvPr>
@@ -3616,7 +3616,7 @@
           <p:cNvPr id="8" name="">
             <a:extLst xmlns:a="http://schemas.openxmlformats.org/drawingml/2006/main">
               <a:ext uri="{FF2B5EF4-FFF2-40B4-BE49-F238E27FC236}">
-                <a16:creationId xmlns:a16="http://schemas.microsoft.com/office/drawing/2014/main" id="{1BE30D91-A159-45A9-971A-9CFE85360553}"/>
+                <a16:creationId xmlns:a16="http://schemas.microsoft.com/office/drawing/2014/main" id="{D29693B4-1DEF-4033-BD9A-4C9DF31AD238}"/>
               </a:ext>
             </a:extLst>
           </p:cNvPr>
@@ -3673,7 +3673,7 @@
           <p:cNvPr id="9" name="">
             <a:extLst xmlns:a="http://schemas.openxmlformats.org/drawingml/2006/main">
               <a:ext uri="{FF2B5EF4-FFF2-40B4-BE49-F238E27FC236}">
-                <a16:creationId xmlns:a16="http://schemas.microsoft.com/office/drawing/2014/main" id="{FBA29FB6-B37A-4E8B-AC8A-A5E0CE1290B4}"/>
+                <a16:creationId xmlns:a16="http://schemas.microsoft.com/office/drawing/2014/main" id="{09A6F60C-7AB4-4C0F-A127-C97DF6E2DAFD}"/>
               </a:ext>
             </a:extLst>
           </p:cNvPr>
@@ -3730,7 +3730,7 @@
           <p:cNvPr id="10" name="">
             <a:extLst xmlns:a="http://schemas.openxmlformats.org/drawingml/2006/main">
               <a:ext uri="{FF2B5EF4-FFF2-40B4-BE49-F238E27FC236}">
-                <a16:creationId xmlns:a16="http://schemas.microsoft.com/office/drawing/2014/main" id="{6496B8D3-DD81-4752-9530-467756CBF89D}"/>
+                <a16:creationId xmlns:a16="http://schemas.microsoft.com/office/drawing/2014/main" id="{3E5E568B-9E2B-4735-A69C-73BB4E2E6CFA}"/>
               </a:ext>
             </a:extLst>
           </p:cNvPr>
@@ -3787,7 +3787,7 @@
           <p:cNvPr id="11" name="">
             <a:extLst xmlns:a="http://schemas.openxmlformats.org/drawingml/2006/main">
               <a:ext uri="{FF2B5EF4-FFF2-40B4-BE49-F238E27FC236}">
-                <a16:creationId xmlns:a16="http://schemas.microsoft.com/office/drawing/2014/main" id="{7BB41E52-3F28-48E8-9261-EF30FBC01AD2}"/>
+                <a16:creationId xmlns:a16="http://schemas.microsoft.com/office/drawing/2014/main" id="{118096D2-8A97-43BC-AFB5-2345B152D54F}"/>
               </a:ext>
             </a:extLst>
           </p:cNvPr>
@@ -3821,7 +3821,7 @@
           <p:cNvPr id="12" name="">
             <a:extLst xmlns:a="http://schemas.openxmlformats.org/drawingml/2006/main">
               <a:ext uri="{FF2B5EF4-FFF2-40B4-BE49-F238E27FC236}">
-                <a16:creationId xmlns:a16="http://schemas.microsoft.com/office/drawing/2014/main" id="{AFE47CAA-3390-47CC-83A3-6E8F1290CC36}"/>
+                <a16:creationId xmlns:a16="http://schemas.microsoft.com/office/drawing/2014/main" id="{7BAAE586-2B82-4EA9-8F13-F49DF55E1E7B}"/>
               </a:ext>
             </a:extLst>
           </p:cNvPr>
@@ -3878,7 +3878,7 @@
           <p:cNvPr id="13" name="">
             <a:extLst xmlns:a="http://schemas.openxmlformats.org/drawingml/2006/main">
               <a:ext uri="{FF2B5EF4-FFF2-40B4-BE49-F238E27FC236}">
-                <a16:creationId xmlns:a16="http://schemas.microsoft.com/office/drawing/2014/main" id="{3A808080-5037-4699-9671-3649031E27AD}"/>
+                <a16:creationId xmlns:a16="http://schemas.microsoft.com/office/drawing/2014/main" id="{9EF412E7-2027-4AFE-B5B4-753241F6ABCE}"/>
               </a:ext>
             </a:extLst>
           </p:cNvPr>
@@ -3935,7 +3935,7 @@
           <p:cNvPr id="14" name="">
             <a:extLst xmlns:a="http://schemas.openxmlformats.org/drawingml/2006/main">
               <a:ext uri="{FF2B5EF4-FFF2-40B4-BE49-F238E27FC236}">
-                <a16:creationId xmlns:a16="http://schemas.microsoft.com/office/drawing/2014/main" id="{2953A70E-30B2-4AB6-A887-A99FA93703D0}"/>
+                <a16:creationId xmlns:a16="http://schemas.microsoft.com/office/drawing/2014/main" id="{C320D3B3-F5A8-4C41-A7E6-74F61A539BAD}"/>
               </a:ext>
             </a:extLst>
           </p:cNvPr>
@@ -3992,7 +3992,7 @@
           <p:cNvPr id="15" name="">
             <a:extLst xmlns:a="http://schemas.openxmlformats.org/drawingml/2006/main">
               <a:ext uri="{FF2B5EF4-FFF2-40B4-BE49-F238E27FC236}">
-                <a16:creationId xmlns:a16="http://schemas.microsoft.com/office/drawing/2014/main" id="{0FB459B7-C57B-44F2-8294-43BF9D8DEFCB}"/>
+                <a16:creationId xmlns:a16="http://schemas.microsoft.com/office/drawing/2014/main" id="{996A7258-2739-477F-8EDE-365D103E9CB5}"/>
               </a:ext>
             </a:extLst>
           </p:cNvPr>
@@ -4026,7 +4026,7 @@
           <p:cNvPr id="16" name="">
             <a:extLst xmlns:a="http://schemas.openxmlformats.org/drawingml/2006/main">
               <a:ext uri="{FF2B5EF4-FFF2-40B4-BE49-F238E27FC236}">
-                <a16:creationId xmlns:a16="http://schemas.microsoft.com/office/drawing/2014/main" id="{B010215F-69E7-43AA-94D2-AC78EC2214FB}"/>
+                <a16:creationId xmlns:a16="http://schemas.microsoft.com/office/drawing/2014/main" id="{141020C7-4A13-4A2E-86D9-A63E04D9CC91}"/>
               </a:ext>
             </a:extLst>
           </p:cNvPr>
@@ -4083,7 +4083,7 @@
           <p:cNvPr id="17" name="">
             <a:extLst xmlns:a="http://schemas.openxmlformats.org/drawingml/2006/main">
               <a:ext uri="{FF2B5EF4-FFF2-40B4-BE49-F238E27FC236}">
-                <a16:creationId xmlns:a16="http://schemas.microsoft.com/office/drawing/2014/main" id="{CD3FB019-9F51-4C45-AC75-51BBB0D34390}"/>
+                <a16:creationId xmlns:a16="http://schemas.microsoft.com/office/drawing/2014/main" id="{47037988-B594-4541-9012-C776DC18F3A1}"/>
               </a:ext>
             </a:extLst>
           </p:cNvPr>
@@ -4140,7 +4140,7 @@
           <p:cNvPr id="18" name="">
             <a:extLst xmlns:a="http://schemas.openxmlformats.org/drawingml/2006/main">
               <a:ext uri="{FF2B5EF4-FFF2-40B4-BE49-F238E27FC236}">
-                <a16:creationId xmlns:a16="http://schemas.microsoft.com/office/drawing/2014/main" id="{74DBFEAF-1B7E-45CF-BED6-798B96AFF882}"/>
+                <a16:creationId xmlns:a16="http://schemas.microsoft.com/office/drawing/2014/main" id="{D71C636A-FA07-45AF-957A-BD4E3001B2EC}"/>
               </a:ext>
             </a:extLst>
           </p:cNvPr>
@@ -4195,7 +4195,7 @@
     </p:spTree>
     <p:extLst>
       <p:ext uri="{BB962C8B-B14F-4D97-AF65-F5344CB8AC3E}">
-        <p14:creationId xmlns:p14="http://schemas.microsoft.com/office/powerpoint/2010/main" val="381845543"/>
+        <p14:creationId xmlns:p14="http://schemas.microsoft.com/office/powerpoint/2010/main" val="1592998087"/>
       </p:ext>
     </p:extLst>
   </p:cSld>
@@ -4350,7 +4350,7 @@
           <p:cNvPr id="23" name="">
             <a:extLst xmlns:a="http://schemas.openxmlformats.org/drawingml/2006/main">
               <a:ext uri="{FF2B5EF4-FFF2-40B4-BE49-F238E27FC236}">
-                <a16:creationId xmlns:a16="http://schemas.microsoft.com/office/drawing/2014/main" id="{CF2E4459-A157-4D24-9FE6-6003F6DEC4EB}"/>
+                <a16:creationId xmlns:a16="http://schemas.microsoft.com/office/drawing/2014/main" id="{D268876E-A43F-4EBB-9C80-94135FB7CEA0}"/>
               </a:ext>
             </a:extLst>
           </p:cNvPr>
@@ -4382,7 +4382,7 @@
           <p:cNvPr id="2" name="">
             <a:extLst xmlns:a="http://schemas.openxmlformats.org/drawingml/2006/main">
               <a:ext uri="{FF2B5EF4-FFF2-40B4-BE49-F238E27FC236}">
-                <a16:creationId xmlns:a16="http://schemas.microsoft.com/office/drawing/2014/main" id="{406895ED-BCB0-4B6C-A1DB-CBD0604646B1}"/>
+                <a16:creationId xmlns:a16="http://schemas.microsoft.com/office/drawing/2014/main" id="{D3AE9E82-0D33-4BDF-83A6-21734FF00F63}"/>
               </a:ext>
             </a:extLst>
           </p:cNvPr>
@@ -4439,7 +4439,7 @@
           <p:cNvPr id="3" name="">
             <a:extLst xmlns:a="http://schemas.openxmlformats.org/drawingml/2006/main">
               <a:ext uri="{FF2B5EF4-FFF2-40B4-BE49-F238E27FC236}">
-                <a16:creationId xmlns:a16="http://schemas.microsoft.com/office/drawing/2014/main" id="{F5898803-8597-4851-B10F-03AAAB421DAB}"/>
+                <a16:creationId xmlns:a16="http://schemas.microsoft.com/office/drawing/2014/main" id="{9BBC33B8-F4F8-4381-9E48-DDE5321D4446}"/>
               </a:ext>
             </a:extLst>
           </p:cNvPr>
@@ -4471,7 +4471,7 @@
           <p:cNvPr id="4" name="">
             <a:extLst xmlns:a="http://schemas.openxmlformats.org/drawingml/2006/main">
               <a:ext uri="{FF2B5EF4-FFF2-40B4-BE49-F238E27FC236}">
-                <a16:creationId xmlns:a16="http://schemas.microsoft.com/office/drawing/2014/main" id="{6F2B3242-0E0F-47F0-B7A1-18115BCC740F}"/>
+                <a16:creationId xmlns:a16="http://schemas.microsoft.com/office/drawing/2014/main" id="{34D309A2-9B32-4B71-AB22-4783EC786FEF}"/>
               </a:ext>
             </a:extLst>
           </p:cNvPr>
@@ -4528,7 +4528,7 @@
           <p:cNvPr id="5" name="">
             <a:extLst xmlns:a="http://schemas.openxmlformats.org/drawingml/2006/main">
               <a:ext uri="{FF2B5EF4-FFF2-40B4-BE49-F238E27FC236}">
-                <a16:creationId xmlns:a16="http://schemas.microsoft.com/office/drawing/2014/main" id="{98FAE0E5-788A-4974-8A88-F7A3B5714968}"/>
+                <a16:creationId xmlns:a16="http://schemas.microsoft.com/office/drawing/2014/main" id="{26038236-C07F-4A34-A4CE-3EC6812096AA}"/>
               </a:ext>
             </a:extLst>
           </p:cNvPr>
@@ -4585,7 +4585,7 @@
           <p:cNvPr id="6" name="">
             <a:extLst xmlns:a="http://schemas.openxmlformats.org/drawingml/2006/main">
               <a:ext uri="{FF2B5EF4-FFF2-40B4-BE49-F238E27FC236}">
-                <a16:creationId xmlns:a16="http://schemas.microsoft.com/office/drawing/2014/main" id="{100A87C4-1FAB-4652-837C-417651DF2D79}"/>
+                <a16:creationId xmlns:a16="http://schemas.microsoft.com/office/drawing/2014/main" id="{8CE1D29C-C5A0-4E1E-A244-958456ABF84D}"/>
               </a:ext>
             </a:extLst>
           </p:cNvPr>
@@ -4642,7 +4642,7 @@
           <p:cNvPr id="7" name="">
             <a:extLst xmlns:a="http://schemas.openxmlformats.org/drawingml/2006/main">
               <a:ext uri="{FF2B5EF4-FFF2-40B4-BE49-F238E27FC236}">
-                <a16:creationId xmlns:a16="http://schemas.microsoft.com/office/drawing/2014/main" id="{DE1DA2F4-FD83-4E8F-BBAC-B542F072BCB2}"/>
+                <a16:creationId xmlns:a16="http://schemas.microsoft.com/office/drawing/2014/main" id="{F2F87ED5-6948-4591-B597-B48F764C6AC4}"/>
               </a:ext>
             </a:extLst>
           </p:cNvPr>
@@ -4674,7 +4674,7 @@
           <p:cNvPr id="8" name="">
             <a:extLst xmlns:a="http://schemas.openxmlformats.org/drawingml/2006/main">
               <a:ext uri="{FF2B5EF4-FFF2-40B4-BE49-F238E27FC236}">
-                <a16:creationId xmlns:a16="http://schemas.microsoft.com/office/drawing/2014/main" id="{5E4EFBBB-06DE-44B4-8E39-A69491648EF4}"/>
+                <a16:creationId xmlns:a16="http://schemas.microsoft.com/office/drawing/2014/main" id="{1820AA0E-C641-4F09-ADC0-C3A9070A4854}"/>
               </a:ext>
             </a:extLst>
           </p:cNvPr>
@@ -4731,7 +4731,7 @@
           <p:cNvPr id="9" name="">
             <a:extLst xmlns:a="http://schemas.openxmlformats.org/drawingml/2006/main">
               <a:ext uri="{FF2B5EF4-FFF2-40B4-BE49-F238E27FC236}">
-                <a16:creationId xmlns:a16="http://schemas.microsoft.com/office/drawing/2014/main" id="{D516F38A-6A43-4774-8C8D-07024CDC750E}"/>
+                <a16:creationId xmlns:a16="http://schemas.microsoft.com/office/drawing/2014/main" id="{CF89ED5D-CDC1-477D-92B0-4DB76A2856EC}"/>
               </a:ext>
             </a:extLst>
           </p:cNvPr>
@@ -4788,7 +4788,7 @@
           <p:cNvPr id="10" name="">
             <a:extLst xmlns:a="http://schemas.openxmlformats.org/drawingml/2006/main">
               <a:ext uri="{FF2B5EF4-FFF2-40B4-BE49-F238E27FC236}">
-                <a16:creationId xmlns:a16="http://schemas.microsoft.com/office/drawing/2014/main" id="{942D4054-03A1-48FD-9E7C-EE37BAF13922}"/>
+                <a16:creationId xmlns:a16="http://schemas.microsoft.com/office/drawing/2014/main" id="{0057BCF7-CAA6-45C6-89B4-1BA31BFA735B}"/>
               </a:ext>
             </a:extLst>
           </p:cNvPr>
@@ -4822,7 +4822,7 @@
           <p:cNvPr id="11" name="">
             <a:extLst xmlns:a="http://schemas.openxmlformats.org/drawingml/2006/main">
               <a:ext uri="{FF2B5EF4-FFF2-40B4-BE49-F238E27FC236}">
-                <a16:creationId xmlns:a16="http://schemas.microsoft.com/office/drawing/2014/main" id="{FDB784C0-9AD2-425D-8757-52181FD00E4B}"/>
+                <a16:creationId xmlns:a16="http://schemas.microsoft.com/office/drawing/2014/main" id="{C856429E-64D2-4097-93A2-910A648981D4}"/>
               </a:ext>
             </a:extLst>
           </p:cNvPr>
@@ -4854,7 +4854,7 @@
           <p:cNvPr id="12" name="">
             <a:extLst xmlns:a="http://schemas.openxmlformats.org/drawingml/2006/main">
               <a:ext uri="{FF2B5EF4-FFF2-40B4-BE49-F238E27FC236}">
-                <a16:creationId xmlns:a16="http://schemas.microsoft.com/office/drawing/2014/main" id="{C2908471-1356-4D14-9705-9B4288693D1B}"/>
+                <a16:creationId xmlns:a16="http://schemas.microsoft.com/office/drawing/2014/main" id="{4BC83B26-71EE-4CC9-8E42-BA4AA8ECAF34}"/>
               </a:ext>
             </a:extLst>
           </p:cNvPr>
@@ -4911,7 +4911,7 @@
           <p:cNvPr id="13" name="">
             <a:extLst xmlns:a="http://schemas.openxmlformats.org/drawingml/2006/main">
               <a:ext uri="{FF2B5EF4-FFF2-40B4-BE49-F238E27FC236}">
-                <a16:creationId xmlns:a16="http://schemas.microsoft.com/office/drawing/2014/main" id="{594DA027-E5BE-4743-AA55-268322E709F2}"/>
+                <a16:creationId xmlns:a16="http://schemas.microsoft.com/office/drawing/2014/main" id="{3360D142-6F0B-4295-98C0-745EFC3B6F9A}"/>
               </a:ext>
             </a:extLst>
           </p:cNvPr>
@@ -4968,7 +4968,7 @@
           <p:cNvPr id="14" name="">
             <a:extLst xmlns:a="http://schemas.openxmlformats.org/drawingml/2006/main">
               <a:ext uri="{FF2B5EF4-FFF2-40B4-BE49-F238E27FC236}">
-                <a16:creationId xmlns:a16="http://schemas.microsoft.com/office/drawing/2014/main" id="{AFE0C53B-3BEC-4E02-B2F1-0A2BE96EC522}"/>
+                <a16:creationId xmlns:a16="http://schemas.microsoft.com/office/drawing/2014/main" id="{0FF35C09-ACF6-4467-A052-959EBA4C0833}"/>
               </a:ext>
             </a:extLst>
           </p:cNvPr>
@@ -5002,7 +5002,7 @@
           <p:cNvPr id="15" name="">
             <a:extLst xmlns:a="http://schemas.openxmlformats.org/drawingml/2006/main">
               <a:ext uri="{FF2B5EF4-FFF2-40B4-BE49-F238E27FC236}">
-                <a16:creationId xmlns:a16="http://schemas.microsoft.com/office/drawing/2014/main" id="{134D89E0-1198-4D80-9DB0-20E7310417E7}"/>
+                <a16:creationId xmlns:a16="http://schemas.microsoft.com/office/drawing/2014/main" id="{E0DF4479-E8C3-480D-8F86-5C10AF9229FB}"/>
               </a:ext>
             </a:extLst>
           </p:cNvPr>
@@ -5034,7 +5034,7 @@
           <p:cNvPr id="16" name="">
             <a:extLst xmlns:a="http://schemas.openxmlformats.org/drawingml/2006/main">
               <a:ext uri="{FF2B5EF4-FFF2-40B4-BE49-F238E27FC236}">
-                <a16:creationId xmlns:a16="http://schemas.microsoft.com/office/drawing/2014/main" id="{0A15A276-5DCE-470E-BBEA-16EE43311233}"/>
+                <a16:creationId xmlns:a16="http://schemas.microsoft.com/office/drawing/2014/main" id="{CF510A34-7C39-4DBB-8789-41A0A5371DFB}"/>
               </a:ext>
             </a:extLst>
           </p:cNvPr>
@@ -5091,7 +5091,7 @@
           <p:cNvPr id="17" name="">
             <a:extLst xmlns:a="http://schemas.openxmlformats.org/drawingml/2006/main">
               <a:ext uri="{FF2B5EF4-FFF2-40B4-BE49-F238E27FC236}">
-                <a16:creationId xmlns:a16="http://schemas.microsoft.com/office/drawing/2014/main" id="{258D4C55-9336-47AB-A909-0937529AE64E}"/>
+                <a16:creationId xmlns:a16="http://schemas.microsoft.com/office/drawing/2014/main" id="{9FF7C907-95DD-431B-B148-CF43A3E6BD57}"/>
               </a:ext>
             </a:extLst>
           </p:cNvPr>
@@ -5148,7 +5148,7 @@
           <p:cNvPr id="18" name="">
             <a:extLst xmlns:a="http://schemas.openxmlformats.org/drawingml/2006/main">
               <a:ext uri="{FF2B5EF4-FFF2-40B4-BE49-F238E27FC236}">
-                <a16:creationId xmlns:a16="http://schemas.microsoft.com/office/drawing/2014/main" id="{3F423263-E86F-4ACB-82C1-0A909015F32F}"/>
+                <a16:creationId xmlns:a16="http://schemas.microsoft.com/office/drawing/2014/main" id="{0C348D0F-AF2A-45EA-809C-C3BAD6AD17CF}"/>
               </a:ext>
             </a:extLst>
           </p:cNvPr>
@@ -5182,7 +5182,7 @@
           <p:cNvPr id="19" name="">
             <a:extLst xmlns:a="http://schemas.openxmlformats.org/drawingml/2006/main">
               <a:ext uri="{FF2B5EF4-FFF2-40B4-BE49-F238E27FC236}">
-                <a16:creationId xmlns:a16="http://schemas.microsoft.com/office/drawing/2014/main" id="{70DE6FE9-355F-4D67-95ED-3FCC29135B43}"/>
+                <a16:creationId xmlns:a16="http://schemas.microsoft.com/office/drawing/2014/main" id="{FB087B9E-3A91-4C8C-AB4E-A695A5A1B558}"/>
               </a:ext>
             </a:extLst>
           </p:cNvPr>
@@ -5214,7 +5214,7 @@
           <p:cNvPr id="20" name="">
             <a:extLst xmlns:a="http://schemas.openxmlformats.org/drawingml/2006/main">
               <a:ext uri="{FF2B5EF4-FFF2-40B4-BE49-F238E27FC236}">
-                <a16:creationId xmlns:a16="http://schemas.microsoft.com/office/drawing/2014/main" id="{F6BA0E44-FE3E-4788-9615-23C8D59F9253}"/>
+                <a16:creationId xmlns:a16="http://schemas.microsoft.com/office/drawing/2014/main" id="{4542A01E-3B2B-4ED6-8DBE-A6A83AB84D5D}"/>
               </a:ext>
             </a:extLst>
           </p:cNvPr>
@@ -5271,7 +5271,7 @@
           <p:cNvPr id="21" name="">
             <a:extLst xmlns:a="http://schemas.openxmlformats.org/drawingml/2006/main">
               <a:ext uri="{FF2B5EF4-FFF2-40B4-BE49-F238E27FC236}">
-                <a16:creationId xmlns:a16="http://schemas.microsoft.com/office/drawing/2014/main" id="{88904B7F-F6D2-41A2-85B7-762D5B37AB94}"/>
+                <a16:creationId xmlns:a16="http://schemas.microsoft.com/office/drawing/2014/main" id="{AF785375-B5CA-4AF0-BDD8-2B6B63FD7218}"/>
               </a:ext>
             </a:extLst>
           </p:cNvPr>
@@ -5328,7 +5328,7 @@
           <p:cNvPr id="22" name="">
             <a:extLst xmlns:a="http://schemas.openxmlformats.org/drawingml/2006/main">
               <a:ext uri="{FF2B5EF4-FFF2-40B4-BE49-F238E27FC236}">
-                <a16:creationId xmlns:a16="http://schemas.microsoft.com/office/drawing/2014/main" id="{408A8FB8-141A-4CFB-8655-89E6C2AAC87C}"/>
+                <a16:creationId xmlns:a16="http://schemas.microsoft.com/office/drawing/2014/main" id="{4F8EF498-36E5-4B17-B3D3-1C9CD97AF939}"/>
               </a:ext>
             </a:extLst>
           </p:cNvPr>
@@ -5383,7 +5383,7 @@
     </p:spTree>
     <p:extLst>
       <p:ext uri="{BB962C8B-B14F-4D97-AF65-F5344CB8AC3E}">
-        <p14:creationId xmlns:p14="http://schemas.microsoft.com/office/powerpoint/2010/main" val="476034366"/>
+        <p14:creationId xmlns:p14="http://schemas.microsoft.com/office/powerpoint/2010/main" val="410830991"/>
       </p:ext>
     </p:extLst>
   </p:cSld>
@@ -5584,7 +5584,7 @@
           <p:cNvPr id="23" name="">
             <a:extLst xmlns:a="http://schemas.openxmlformats.org/drawingml/2006/main">
               <a:ext uri="{FF2B5EF4-FFF2-40B4-BE49-F238E27FC236}">
-                <a16:creationId xmlns:a16="http://schemas.microsoft.com/office/drawing/2014/main" id="{1CB6A316-D355-4DA3-BFC9-9712634110FE}"/>
+                <a16:creationId xmlns:a16="http://schemas.microsoft.com/office/drawing/2014/main" id="{A686EBF6-2B40-4AF0-AD1C-BFE732CB07FB}"/>
               </a:ext>
             </a:extLst>
           </p:cNvPr>
@@ -5616,7 +5616,7 @@
           <p:cNvPr id="2" name="">
             <a:extLst xmlns:a="http://schemas.openxmlformats.org/drawingml/2006/main">
               <a:ext uri="{FF2B5EF4-FFF2-40B4-BE49-F238E27FC236}">
-                <a16:creationId xmlns:a16="http://schemas.microsoft.com/office/drawing/2014/main" id="{D72F1521-8E59-48A5-A9C5-2FFF70E96459}"/>
+                <a16:creationId xmlns:a16="http://schemas.microsoft.com/office/drawing/2014/main" id="{024ED945-7022-40C4-8656-C91D8F2E85FC}"/>
               </a:ext>
             </a:extLst>
           </p:cNvPr>
@@ -5673,7 +5673,7 @@
           <p:cNvPr id="3" name="">
             <a:extLst xmlns:a="http://schemas.openxmlformats.org/drawingml/2006/main">
               <a:ext uri="{FF2B5EF4-FFF2-40B4-BE49-F238E27FC236}">
-                <a16:creationId xmlns:a16="http://schemas.microsoft.com/office/drawing/2014/main" id="{56BE2239-F327-4726-9274-9D8386DBFB69}"/>
+                <a16:creationId xmlns:a16="http://schemas.microsoft.com/office/drawing/2014/main" id="{BEE6C68A-3517-4608-BB7C-BF7040B987EB}"/>
               </a:ext>
             </a:extLst>
           </p:cNvPr>
@@ -5705,7 +5705,7 @@
           <p:cNvPr id="4" name="">
             <a:extLst xmlns:a="http://schemas.openxmlformats.org/drawingml/2006/main">
               <a:ext uri="{FF2B5EF4-FFF2-40B4-BE49-F238E27FC236}">
-                <a16:creationId xmlns:a16="http://schemas.microsoft.com/office/drawing/2014/main" id="{91B42AEE-1F56-4809-A1E4-61ECDF59C0D1}"/>
+                <a16:creationId xmlns:a16="http://schemas.microsoft.com/office/drawing/2014/main" id="{E2D3D870-7C6C-4AC9-BE83-26459A122D4D}"/>
               </a:ext>
             </a:extLst>
           </p:cNvPr>
@@ -5762,7 +5762,7 @@
           <p:cNvPr id="5" name="">
             <a:extLst xmlns:a="http://schemas.openxmlformats.org/drawingml/2006/main">
               <a:ext uri="{FF2B5EF4-FFF2-40B4-BE49-F238E27FC236}">
-                <a16:creationId xmlns:a16="http://schemas.microsoft.com/office/drawing/2014/main" id="{7FC50265-7638-4170-910E-108727ACC28A}"/>
+                <a16:creationId xmlns:a16="http://schemas.microsoft.com/office/drawing/2014/main" id="{BC3B294C-FF72-4EC7-8E54-1A4B5608E109}"/>
               </a:ext>
             </a:extLst>
           </p:cNvPr>
@@ -5819,7 +5819,7 @@
           <p:cNvPr id="6" name="">
             <a:extLst xmlns:a="http://schemas.openxmlformats.org/drawingml/2006/main">
               <a:ext uri="{FF2B5EF4-FFF2-40B4-BE49-F238E27FC236}">
-                <a16:creationId xmlns:a16="http://schemas.microsoft.com/office/drawing/2014/main" id="{2C8FCF6A-0181-4E0A-A446-1EE80A4A5CA7}"/>
+                <a16:creationId xmlns:a16="http://schemas.microsoft.com/office/drawing/2014/main" id="{289002A4-24FD-4162-854A-0954B8BCB9B1}"/>
               </a:ext>
             </a:extLst>
           </p:cNvPr>
@@ -5876,7 +5876,7 @@
           <p:cNvPr id="7" name="">
             <a:extLst xmlns:a="http://schemas.openxmlformats.org/drawingml/2006/main">
               <a:ext uri="{FF2B5EF4-FFF2-40B4-BE49-F238E27FC236}">
-                <a16:creationId xmlns:a16="http://schemas.microsoft.com/office/drawing/2014/main" id="{BE8C3C25-B3D3-477D-A62C-BE99F3A9EB47}"/>
+                <a16:creationId xmlns:a16="http://schemas.microsoft.com/office/drawing/2014/main" id="{496B23DA-97B4-4C9C-871F-B85AE9CF8FCF}"/>
               </a:ext>
             </a:extLst>
           </p:cNvPr>
@@ -5908,7 +5908,7 @@
           <p:cNvPr id="8" name="">
             <a:extLst xmlns:a="http://schemas.openxmlformats.org/drawingml/2006/main">
               <a:ext uri="{FF2B5EF4-FFF2-40B4-BE49-F238E27FC236}">
-                <a16:creationId xmlns:a16="http://schemas.microsoft.com/office/drawing/2014/main" id="{4E4CE185-57A9-40F7-B4BD-CD2E9462D900}"/>
+                <a16:creationId xmlns:a16="http://schemas.microsoft.com/office/drawing/2014/main" id="{C153A488-7DDD-44AF-8BFC-607A9E9A11F3}"/>
               </a:ext>
             </a:extLst>
           </p:cNvPr>
@@ -5965,7 +5965,7 @@
           <p:cNvPr id="9" name="">
             <a:extLst xmlns:a="http://schemas.openxmlformats.org/drawingml/2006/main">
               <a:ext uri="{FF2B5EF4-FFF2-40B4-BE49-F238E27FC236}">
-                <a16:creationId xmlns:a16="http://schemas.microsoft.com/office/drawing/2014/main" id="{4A954DDF-67C3-4142-8129-F6F19C4EED2E}"/>
+                <a16:creationId xmlns:a16="http://schemas.microsoft.com/office/drawing/2014/main" id="{F0EC07C8-B013-4CA4-84BB-533FC94E4641}"/>
               </a:ext>
             </a:extLst>
           </p:cNvPr>
@@ -6022,7 +6022,7 @@
           <p:cNvPr id="10" name="">
             <a:extLst xmlns:a="http://schemas.openxmlformats.org/drawingml/2006/main">
               <a:ext uri="{FF2B5EF4-FFF2-40B4-BE49-F238E27FC236}">
-                <a16:creationId xmlns:a16="http://schemas.microsoft.com/office/drawing/2014/main" id="{7CF7605B-70A2-486D-80E6-861883DC286D}"/>
+                <a16:creationId xmlns:a16="http://schemas.microsoft.com/office/drawing/2014/main" id="{B3A5222D-F867-43C8-8839-CBCE91E7CCB4}"/>
               </a:ext>
             </a:extLst>
           </p:cNvPr>
@@ -6056,7 +6056,7 @@
           <p:cNvPr id="11" name="">
             <a:extLst xmlns:a="http://schemas.openxmlformats.org/drawingml/2006/main">
               <a:ext uri="{FF2B5EF4-FFF2-40B4-BE49-F238E27FC236}">
-                <a16:creationId xmlns:a16="http://schemas.microsoft.com/office/drawing/2014/main" id="{DC14699A-1CA7-44BF-8E19-37CE317CD2CF}"/>
+                <a16:creationId xmlns:a16="http://schemas.microsoft.com/office/drawing/2014/main" id="{1112D46F-85C4-4442-B762-5916C6C2985B}"/>
               </a:ext>
             </a:extLst>
           </p:cNvPr>
@@ -6088,7 +6088,7 @@
           <p:cNvPr id="12" name="">
             <a:extLst xmlns:a="http://schemas.openxmlformats.org/drawingml/2006/main">
               <a:ext uri="{FF2B5EF4-FFF2-40B4-BE49-F238E27FC236}">
-                <a16:creationId xmlns:a16="http://schemas.microsoft.com/office/drawing/2014/main" id="{656FA2BF-F74E-45D3-B046-E9F032CE5262}"/>
+                <a16:creationId xmlns:a16="http://schemas.microsoft.com/office/drawing/2014/main" id="{B8098DA7-48FE-48EA-9E07-EFB0AF2D4D7C}"/>
               </a:ext>
             </a:extLst>
           </p:cNvPr>
@@ -6145,7 +6145,7 @@
           <p:cNvPr id="13" name="">
             <a:extLst xmlns:a="http://schemas.openxmlformats.org/drawingml/2006/main">
               <a:ext uri="{FF2B5EF4-FFF2-40B4-BE49-F238E27FC236}">
-                <a16:creationId xmlns:a16="http://schemas.microsoft.com/office/drawing/2014/main" id="{1FB3BD0C-6A0A-4C65-9BBC-252651C3C47E}"/>
+                <a16:creationId xmlns:a16="http://schemas.microsoft.com/office/drawing/2014/main" id="{A6E88C1B-496C-41BF-AFCB-369CADDFBF6C}"/>
               </a:ext>
             </a:extLst>
           </p:cNvPr>
@@ -6202,7 +6202,7 @@
           <p:cNvPr id="14" name="">
             <a:extLst xmlns:a="http://schemas.openxmlformats.org/drawingml/2006/main">
               <a:ext uri="{FF2B5EF4-FFF2-40B4-BE49-F238E27FC236}">
-                <a16:creationId xmlns:a16="http://schemas.microsoft.com/office/drawing/2014/main" id="{89A9AAC2-63BE-4564-8B63-22D05BCE9891}"/>
+                <a16:creationId xmlns:a16="http://schemas.microsoft.com/office/drawing/2014/main" id="{27EED687-172A-466E-A757-AE7E16F3901C}"/>
               </a:ext>
             </a:extLst>
           </p:cNvPr>
@@ -6236,7 +6236,7 @@
           <p:cNvPr id="15" name="">
             <a:extLst xmlns:a="http://schemas.openxmlformats.org/drawingml/2006/main">
               <a:ext uri="{FF2B5EF4-FFF2-40B4-BE49-F238E27FC236}">
-                <a16:creationId xmlns:a16="http://schemas.microsoft.com/office/drawing/2014/main" id="{B5829C3E-013F-420A-8A7B-475B00262312}"/>
+                <a16:creationId xmlns:a16="http://schemas.microsoft.com/office/drawing/2014/main" id="{5F224498-0CD9-4CC5-9F69-ABA574A8B40C}"/>
               </a:ext>
             </a:extLst>
           </p:cNvPr>
@@ -6268,7 +6268,7 @@
           <p:cNvPr id="16" name="">
             <a:extLst xmlns:a="http://schemas.openxmlformats.org/drawingml/2006/main">
               <a:ext uri="{FF2B5EF4-FFF2-40B4-BE49-F238E27FC236}">
-                <a16:creationId xmlns:a16="http://schemas.microsoft.com/office/drawing/2014/main" id="{C10B1A6F-91B5-48EB-805F-13CFE85E1EC2}"/>
+                <a16:creationId xmlns:a16="http://schemas.microsoft.com/office/drawing/2014/main" id="{5A6497CD-DF3C-481E-9125-7537592A6186}"/>
               </a:ext>
             </a:extLst>
           </p:cNvPr>
@@ -6325,7 +6325,7 @@
           <p:cNvPr id="17" name="">
             <a:extLst xmlns:a="http://schemas.openxmlformats.org/drawingml/2006/main">
               <a:ext uri="{FF2B5EF4-FFF2-40B4-BE49-F238E27FC236}">
-                <a16:creationId xmlns:a16="http://schemas.microsoft.com/office/drawing/2014/main" id="{759D44F1-73BB-4E96-B748-2284C924E976}"/>
+                <a16:creationId xmlns:a16="http://schemas.microsoft.com/office/drawing/2014/main" id="{FBF04911-53FF-4DB9-9947-68E2509AA057}"/>
               </a:ext>
             </a:extLst>
           </p:cNvPr>
@@ -6382,7 +6382,7 @@
           <p:cNvPr id="18" name="">
             <a:extLst xmlns:a="http://schemas.openxmlformats.org/drawingml/2006/main">
               <a:ext uri="{FF2B5EF4-FFF2-40B4-BE49-F238E27FC236}">
-                <a16:creationId xmlns:a16="http://schemas.microsoft.com/office/drawing/2014/main" id="{D23987FB-EECD-4A6D-8619-9A94CA3D59BA}"/>
+                <a16:creationId xmlns:a16="http://schemas.microsoft.com/office/drawing/2014/main" id="{31A4CE12-EDFE-4F8A-8EFF-98F1384E44A8}"/>
               </a:ext>
             </a:extLst>
           </p:cNvPr>
@@ -6416,7 +6416,7 @@
           <p:cNvPr id="19" name="">
             <a:extLst xmlns:a="http://schemas.openxmlformats.org/drawingml/2006/main">
               <a:ext uri="{FF2B5EF4-FFF2-40B4-BE49-F238E27FC236}">
-                <a16:creationId xmlns:a16="http://schemas.microsoft.com/office/drawing/2014/main" id="{69AE122C-78A3-4AA1-8765-63F0863CDAE6}"/>
+                <a16:creationId xmlns:a16="http://schemas.microsoft.com/office/drawing/2014/main" id="{E4BD2DB8-57A6-434C-A6ED-26F0AF09BF63}"/>
               </a:ext>
             </a:extLst>
           </p:cNvPr>
@@ -6448,7 +6448,7 @@
           <p:cNvPr id="20" name="">
             <a:extLst xmlns:a="http://schemas.openxmlformats.org/drawingml/2006/main">
               <a:ext uri="{FF2B5EF4-FFF2-40B4-BE49-F238E27FC236}">
-                <a16:creationId xmlns:a16="http://schemas.microsoft.com/office/drawing/2014/main" id="{E09EDF70-01C3-4BCF-AB52-7629D5EFAE5D}"/>
+                <a16:creationId xmlns:a16="http://schemas.microsoft.com/office/drawing/2014/main" id="{D3D53EF6-1865-4ABE-B069-8A4B890742AA}"/>
               </a:ext>
             </a:extLst>
           </p:cNvPr>
@@ -6505,7 +6505,7 @@
           <p:cNvPr id="21" name="">
             <a:extLst xmlns:a="http://schemas.openxmlformats.org/drawingml/2006/main">
               <a:ext uri="{FF2B5EF4-FFF2-40B4-BE49-F238E27FC236}">
-                <a16:creationId xmlns:a16="http://schemas.microsoft.com/office/drawing/2014/main" id="{013BA555-B5ED-43DB-A06B-E08BB509C778}"/>
+                <a16:creationId xmlns:a16="http://schemas.microsoft.com/office/drawing/2014/main" id="{4B394005-AE39-4BA6-9F29-2E3EC915E3C5}"/>
               </a:ext>
             </a:extLst>
           </p:cNvPr>
@@ -6562,7 +6562,7 @@
           <p:cNvPr id="22" name="">
             <a:extLst xmlns:a="http://schemas.openxmlformats.org/drawingml/2006/main">
               <a:ext uri="{FF2B5EF4-FFF2-40B4-BE49-F238E27FC236}">
-                <a16:creationId xmlns:a16="http://schemas.microsoft.com/office/drawing/2014/main" id="{E6275DAF-1BC7-4AF7-8A19-ABCCB0A3719F}"/>
+                <a16:creationId xmlns:a16="http://schemas.microsoft.com/office/drawing/2014/main" id="{71825544-C025-4168-BAB5-E44CAA928ABF}"/>
               </a:ext>
             </a:extLst>
           </p:cNvPr>
@@ -6617,7 +6617,7 @@
     </p:spTree>
     <p:extLst>
       <p:ext uri="{BB962C8B-B14F-4D97-AF65-F5344CB8AC3E}">
-        <p14:creationId xmlns:p14="http://schemas.microsoft.com/office/powerpoint/2010/main" val="2057305109"/>
+        <p14:creationId xmlns:p14="http://schemas.microsoft.com/office/powerpoint/2010/main" val="208462446"/>
       </p:ext>
     </p:extLst>
   </p:cSld>
@@ -6818,7 +6818,7 @@
           <p:cNvPr id="16" name="">
             <a:extLst xmlns:a="http://schemas.openxmlformats.org/drawingml/2006/main">
               <a:ext uri="{FF2B5EF4-FFF2-40B4-BE49-F238E27FC236}">
-                <a16:creationId xmlns:a16="http://schemas.microsoft.com/office/drawing/2014/main" id="{84034F87-C7DC-4313-865C-922A52D96FE4}"/>
+                <a16:creationId xmlns:a16="http://schemas.microsoft.com/office/drawing/2014/main" id="{1B5D9124-1967-40D1-ABE6-BE7189CA1270}"/>
               </a:ext>
             </a:extLst>
           </p:cNvPr>
@@ -6850,7 +6850,7 @@
           <p:cNvPr id="2" name="">
             <a:extLst xmlns:a="http://schemas.openxmlformats.org/drawingml/2006/main">
               <a:ext uri="{FF2B5EF4-FFF2-40B4-BE49-F238E27FC236}">
-                <a16:creationId xmlns:a16="http://schemas.microsoft.com/office/drawing/2014/main" id="{A27BC832-3AAA-4861-B8BA-E908C10A0562}"/>
+                <a16:creationId xmlns:a16="http://schemas.microsoft.com/office/drawing/2014/main" id="{25948697-C685-4EAD-9207-B4C98CDAEC21}"/>
               </a:ext>
             </a:extLst>
           </p:cNvPr>
@@ -6907,7 +6907,7 @@
           <p:cNvPr id="3" name="">
             <a:extLst xmlns:a="http://schemas.openxmlformats.org/drawingml/2006/main">
               <a:ext uri="{FF2B5EF4-FFF2-40B4-BE49-F238E27FC236}">
-                <a16:creationId xmlns:a16="http://schemas.microsoft.com/office/drawing/2014/main" id="{DFF95FD7-07A9-4965-96E4-55EC45359BD2}"/>
+                <a16:creationId xmlns:a16="http://schemas.microsoft.com/office/drawing/2014/main" id="{B30F78F5-8C47-4FE9-96AD-8485E25ABDD7}"/>
               </a:ext>
             </a:extLst>
           </p:cNvPr>
@@ -6939,7 +6939,7 @@
           <p:cNvPr id="4" name="">
             <a:extLst xmlns:a="http://schemas.openxmlformats.org/drawingml/2006/main">
               <a:ext uri="{FF2B5EF4-FFF2-40B4-BE49-F238E27FC236}">
-                <a16:creationId xmlns:a16="http://schemas.microsoft.com/office/drawing/2014/main" id="{9DB46C21-FA59-441B-8110-91152D4E59AA}"/>
+                <a16:creationId xmlns:a16="http://schemas.microsoft.com/office/drawing/2014/main" id="{46B657CA-E3E5-4518-A882-B3DE1F295A29}"/>
               </a:ext>
             </a:extLst>
           </p:cNvPr>
@@ -6996,7 +6996,7 @@
           <p:cNvPr id="5" name="">
             <a:extLst xmlns:a="http://schemas.openxmlformats.org/drawingml/2006/main">
               <a:ext uri="{FF2B5EF4-FFF2-40B4-BE49-F238E27FC236}">
-                <a16:creationId xmlns:a16="http://schemas.microsoft.com/office/drawing/2014/main" id="{D40A3D0F-104F-4B5D-AAAF-72AD8BF346CE}"/>
+                <a16:creationId xmlns:a16="http://schemas.microsoft.com/office/drawing/2014/main" id="{F194DB42-26F4-436E-8ACE-9CBE5B73271B}"/>
               </a:ext>
             </a:extLst>
           </p:cNvPr>
@@ -7053,7 +7053,7 @@
           <p:cNvPr id="6" name="">
             <a:extLst xmlns:a="http://schemas.openxmlformats.org/drawingml/2006/main">
               <a:ext uri="{FF2B5EF4-FFF2-40B4-BE49-F238E27FC236}">
-                <a16:creationId xmlns:a16="http://schemas.microsoft.com/office/drawing/2014/main" id="{123BEAC6-B297-4FA1-B97D-768D3266C27E}"/>
+                <a16:creationId xmlns:a16="http://schemas.microsoft.com/office/drawing/2014/main" id="{C0CCDAC1-A21E-4A68-80D0-A9C99B4C82F7}"/>
               </a:ext>
             </a:extLst>
           </p:cNvPr>
@@ -7110,7 +7110,7 @@
           <p:cNvPr id="7" name="">
             <a:extLst xmlns:a="http://schemas.openxmlformats.org/drawingml/2006/main">
               <a:ext uri="{FF2B5EF4-FFF2-40B4-BE49-F238E27FC236}">
-                <a16:creationId xmlns:a16="http://schemas.microsoft.com/office/drawing/2014/main" id="{66A54BBC-5C8C-46EA-8ABC-C9F590F966BE}"/>
+                <a16:creationId xmlns:a16="http://schemas.microsoft.com/office/drawing/2014/main" id="{2D2ECCEC-D3BB-43C7-B087-9D7B751E8B9D}"/>
               </a:ext>
             </a:extLst>
           </p:cNvPr>
@@ -7142,7 +7142,7 @@
           <p:cNvPr id="8" name="">
             <a:extLst xmlns:a="http://schemas.openxmlformats.org/drawingml/2006/main">
               <a:ext uri="{FF2B5EF4-FFF2-40B4-BE49-F238E27FC236}">
-                <a16:creationId xmlns:a16="http://schemas.microsoft.com/office/drawing/2014/main" id="{7F2A371E-4302-4D96-A8AF-648DD503B34D}"/>
+                <a16:creationId xmlns:a16="http://schemas.microsoft.com/office/drawing/2014/main" id="{32F0624B-6766-4587-8F9D-76F8F080B4AE}"/>
               </a:ext>
             </a:extLst>
           </p:cNvPr>
@@ -7199,7 +7199,7 @@
           <p:cNvPr id="9" name="">
             <a:extLst xmlns:a="http://schemas.openxmlformats.org/drawingml/2006/main">
               <a:ext uri="{FF2B5EF4-FFF2-40B4-BE49-F238E27FC236}">
-                <a16:creationId xmlns:a16="http://schemas.microsoft.com/office/drawing/2014/main" id="{E73AF7F2-CDEB-4517-9093-443AD3AD4F3C}"/>
+                <a16:creationId xmlns:a16="http://schemas.microsoft.com/office/drawing/2014/main" id="{FE0060AF-3D05-4494-8AEF-B2EBDB521B30}"/>
               </a:ext>
             </a:extLst>
           </p:cNvPr>
@@ -7256,7 +7256,7 @@
           <p:cNvPr id="10" name="">
             <a:extLst xmlns:a="http://schemas.openxmlformats.org/drawingml/2006/main">
               <a:ext uri="{FF2B5EF4-FFF2-40B4-BE49-F238E27FC236}">
-                <a16:creationId xmlns:a16="http://schemas.microsoft.com/office/drawing/2014/main" id="{16106FA4-72DA-4EF6-9791-FA0240D28D42}"/>
+                <a16:creationId xmlns:a16="http://schemas.microsoft.com/office/drawing/2014/main" id="{A110AF05-D01B-4982-880C-6A7D49EA82BF}"/>
               </a:ext>
             </a:extLst>
           </p:cNvPr>
@@ -7313,7 +7313,7 @@
           <p:cNvPr id="11" name="">
             <a:extLst xmlns:a="http://schemas.openxmlformats.org/drawingml/2006/main">
               <a:ext uri="{FF2B5EF4-FFF2-40B4-BE49-F238E27FC236}">
-                <a16:creationId xmlns:a16="http://schemas.microsoft.com/office/drawing/2014/main" id="{7AFBD9B2-BF8C-4857-B902-9CC32BF8B7A0}"/>
+                <a16:creationId xmlns:a16="http://schemas.microsoft.com/office/drawing/2014/main" id="{26BEF182-E5D6-4F1B-9903-41B894A75D3D}"/>
               </a:ext>
             </a:extLst>
           </p:cNvPr>
@@ -7345,7 +7345,7 @@
           <p:cNvPr id="12" name="">
             <a:extLst xmlns:a="http://schemas.openxmlformats.org/drawingml/2006/main">
               <a:ext uri="{FF2B5EF4-FFF2-40B4-BE49-F238E27FC236}">
-                <a16:creationId xmlns:a16="http://schemas.microsoft.com/office/drawing/2014/main" id="{9470AAD9-EA72-4AF9-B938-5496620CC27D}"/>
+                <a16:creationId xmlns:a16="http://schemas.microsoft.com/office/drawing/2014/main" id="{BF21DF4B-1D2B-404F-946C-FF13BAAA7B29}"/>
               </a:ext>
             </a:extLst>
           </p:cNvPr>
@@ -7402,7 +7402,7 @@
           <p:cNvPr id="13" name="">
             <a:extLst xmlns:a="http://schemas.openxmlformats.org/drawingml/2006/main">
               <a:ext uri="{FF2B5EF4-FFF2-40B4-BE49-F238E27FC236}">
-                <a16:creationId xmlns:a16="http://schemas.microsoft.com/office/drawing/2014/main" id="{084D84D2-3341-4127-B06E-4F52F9216A6A}"/>
+                <a16:creationId xmlns:a16="http://schemas.microsoft.com/office/drawing/2014/main" id="{EF188813-8FA7-4274-A6D6-CE12FA6F6020}"/>
               </a:ext>
             </a:extLst>
           </p:cNvPr>
@@ -7459,7 +7459,7 @@
           <p:cNvPr id="14" name="">
             <a:extLst xmlns:a="http://schemas.openxmlformats.org/drawingml/2006/main">
               <a:ext uri="{FF2B5EF4-FFF2-40B4-BE49-F238E27FC236}">
-                <a16:creationId xmlns:a16="http://schemas.microsoft.com/office/drawing/2014/main" id="{7B82CC40-EC5F-4231-B876-F466A2961434}"/>
+                <a16:creationId xmlns:a16="http://schemas.microsoft.com/office/drawing/2014/main" id="{AE0573E0-ADD7-493D-B687-E19479395FD0}"/>
               </a:ext>
             </a:extLst>
           </p:cNvPr>
@@ -7516,7 +7516,7 @@
           <p:cNvPr id="15" name="">
             <a:extLst xmlns:a="http://schemas.openxmlformats.org/drawingml/2006/main">
               <a:ext uri="{FF2B5EF4-FFF2-40B4-BE49-F238E27FC236}">
-                <a16:creationId xmlns:a16="http://schemas.microsoft.com/office/drawing/2014/main" id="{8F7B5431-68E8-4FC6-9E93-0FF344874860}"/>
+                <a16:creationId xmlns:a16="http://schemas.microsoft.com/office/drawing/2014/main" id="{CD289C49-2EE2-4A6E-9938-3F99D03609F6}"/>
               </a:ext>
             </a:extLst>
           </p:cNvPr>
@@ -7571,7 +7571,7 @@
     </p:spTree>
     <p:extLst>
       <p:ext uri="{BB962C8B-B14F-4D97-AF65-F5344CB8AC3E}">
-        <p14:creationId xmlns:p14="http://schemas.microsoft.com/office/powerpoint/2010/main" val="1969181862"/>
+        <p14:creationId xmlns:p14="http://schemas.microsoft.com/office/powerpoint/2010/main" val="495872837"/>
       </p:ext>
     </p:extLst>
   </p:cSld>
@@ -7772,7 +7772,7 @@
           <p:cNvPr id="23" name="">
             <a:extLst xmlns:a="http://schemas.openxmlformats.org/drawingml/2006/main">
               <a:ext uri="{FF2B5EF4-FFF2-40B4-BE49-F238E27FC236}">
-                <a16:creationId xmlns:a16="http://schemas.microsoft.com/office/drawing/2014/main" id="{DD77C51D-E4CA-4FB7-9287-AC161DF64CBC}"/>
+                <a16:creationId xmlns:a16="http://schemas.microsoft.com/office/drawing/2014/main" id="{10120541-E2AE-40A9-9A2A-A541229CA19E}"/>
               </a:ext>
             </a:extLst>
           </p:cNvPr>
@@ -7804,7 +7804,7 @@
           <p:cNvPr id="2" name="">
             <a:extLst xmlns:a="http://schemas.openxmlformats.org/drawingml/2006/main">
               <a:ext uri="{FF2B5EF4-FFF2-40B4-BE49-F238E27FC236}">
-                <a16:creationId xmlns:a16="http://schemas.microsoft.com/office/drawing/2014/main" id="{EA888774-F829-4D11-B75B-731032E65C38}"/>
+                <a16:creationId xmlns:a16="http://schemas.microsoft.com/office/drawing/2014/main" id="{81C46E4D-42C0-4089-8FDA-6083C67BE57D}"/>
               </a:ext>
             </a:extLst>
           </p:cNvPr>
@@ -7861,7 +7861,7 @@
           <p:cNvPr id="3" name="">
             <a:extLst xmlns:a="http://schemas.openxmlformats.org/drawingml/2006/main">
               <a:ext uri="{FF2B5EF4-FFF2-40B4-BE49-F238E27FC236}">
-                <a16:creationId xmlns:a16="http://schemas.microsoft.com/office/drawing/2014/main" id="{C197910D-D9DC-43E2-B435-AB5FA82BB8DF}"/>
+                <a16:creationId xmlns:a16="http://schemas.microsoft.com/office/drawing/2014/main" id="{C6E0BFD4-8853-4AC6-9636-EADE653E1065}"/>
               </a:ext>
             </a:extLst>
           </p:cNvPr>
@@ -7893,7 +7893,7 @@
           <p:cNvPr id="4" name="">
             <a:extLst xmlns:a="http://schemas.openxmlformats.org/drawingml/2006/main">
               <a:ext uri="{FF2B5EF4-FFF2-40B4-BE49-F238E27FC236}">
-                <a16:creationId xmlns:a16="http://schemas.microsoft.com/office/drawing/2014/main" id="{8DE8F75A-C8F6-4E95-AA97-07F8A2E19B5C}"/>
+                <a16:creationId xmlns:a16="http://schemas.microsoft.com/office/drawing/2014/main" id="{EB3732A6-4291-4054-9E5E-CFA5752404CA}"/>
               </a:ext>
             </a:extLst>
           </p:cNvPr>
@@ -7950,7 +7950,7 @@
           <p:cNvPr id="5" name="">
             <a:extLst xmlns:a="http://schemas.openxmlformats.org/drawingml/2006/main">
               <a:ext uri="{FF2B5EF4-FFF2-40B4-BE49-F238E27FC236}">
-                <a16:creationId xmlns:a16="http://schemas.microsoft.com/office/drawing/2014/main" id="{ED3CF849-9004-4522-86E3-6CD342BEBB09}"/>
+                <a16:creationId xmlns:a16="http://schemas.microsoft.com/office/drawing/2014/main" id="{44C9C5F3-9CB0-4961-8EB3-21F21871A5CD}"/>
               </a:ext>
             </a:extLst>
           </p:cNvPr>
@@ -8007,7 +8007,7 @@
           <p:cNvPr id="6" name="">
             <a:extLst xmlns:a="http://schemas.openxmlformats.org/drawingml/2006/main">
               <a:ext uri="{FF2B5EF4-FFF2-40B4-BE49-F238E27FC236}">
-                <a16:creationId xmlns:a16="http://schemas.microsoft.com/office/drawing/2014/main" id="{2245B995-4FDD-4769-B360-BCE3F27FE05D}"/>
+                <a16:creationId xmlns:a16="http://schemas.microsoft.com/office/drawing/2014/main" id="{91D9C0B4-5937-4F12-8836-B504B347EE61}"/>
               </a:ext>
             </a:extLst>
           </p:cNvPr>
@@ -8064,7 +8064,7 @@
           <p:cNvPr id="7" name="">
             <a:extLst xmlns:a="http://schemas.openxmlformats.org/drawingml/2006/main">
               <a:ext uri="{FF2B5EF4-FFF2-40B4-BE49-F238E27FC236}">
-                <a16:creationId xmlns:a16="http://schemas.microsoft.com/office/drawing/2014/main" id="{0BB10508-E9A0-4BC7-BADE-129B99C5F8A2}"/>
+                <a16:creationId xmlns:a16="http://schemas.microsoft.com/office/drawing/2014/main" id="{34BF5615-9A45-4552-9E05-AA9ABEDC992C}"/>
               </a:ext>
             </a:extLst>
           </p:cNvPr>
@@ -8096,7 +8096,7 @@
           <p:cNvPr id="8" name="">
             <a:extLst xmlns:a="http://schemas.openxmlformats.org/drawingml/2006/main">
               <a:ext uri="{FF2B5EF4-FFF2-40B4-BE49-F238E27FC236}">
-                <a16:creationId xmlns:a16="http://schemas.microsoft.com/office/drawing/2014/main" id="{7F0F9226-BB2A-4A1E-B6D5-E9E323B8D484}"/>
+                <a16:creationId xmlns:a16="http://schemas.microsoft.com/office/drawing/2014/main" id="{2652762D-0207-444B-B1EE-4FBEDB914C3F}"/>
               </a:ext>
             </a:extLst>
           </p:cNvPr>
@@ -8153,7 +8153,7 @@
           <p:cNvPr id="9" name="">
             <a:extLst xmlns:a="http://schemas.openxmlformats.org/drawingml/2006/main">
               <a:ext uri="{FF2B5EF4-FFF2-40B4-BE49-F238E27FC236}">
-                <a16:creationId xmlns:a16="http://schemas.microsoft.com/office/drawing/2014/main" id="{F04AF1FF-71A7-4806-8FE0-056B917758BD}"/>
+                <a16:creationId xmlns:a16="http://schemas.microsoft.com/office/drawing/2014/main" id="{905A8DAF-A855-453E-A6C0-EF9532686A89}"/>
               </a:ext>
             </a:extLst>
           </p:cNvPr>
@@ -8210,19 +8210,19 @@
           <p:cNvPr id="10" name="">
             <a:extLst xmlns:a="http://schemas.openxmlformats.org/drawingml/2006/main">
               <a:ext uri="{FF2B5EF4-FFF2-40B4-BE49-F238E27FC236}">
-                <a16:creationId xmlns:a16="http://schemas.microsoft.com/office/drawing/2014/main" id="{43EE23BA-04B3-4ADF-9753-8C0A8F2065D1}"/>
-              </a:ext>
-            </a:extLst>
-          </p:cNvPr>
-          <p:cNvSpPr>
-            <a:spLocks xmlns:a="http://schemas.openxmlformats.org/drawingml/2006/main" noGrp="1"/>
-          </p:cNvSpPr>
-          <p:nvPr/>
-        </p:nvSpPr>
-        <p:spPr>
-          <a:xfrm xmlns:a="http://schemas.openxmlformats.org/drawingml/2006/main">
-            <a:off x="914400" y="1257300"/>
-            <a:ext cx="10363200" cy="781050"/>
+                <a16:creationId xmlns:a16="http://schemas.microsoft.com/office/drawing/2014/main" id="{515C4B68-6DED-4496-9D49-F71C6BDE9744}"/>
+              </a:ext>
+            </a:extLst>
+          </p:cNvPr>
+          <p:cNvSpPr>
+            <a:spLocks xmlns:a="http://schemas.openxmlformats.org/drawingml/2006/main" noGrp="1"/>
+          </p:cNvSpPr>
+          <p:nvPr/>
+        </p:nvSpPr>
+        <p:spPr>
+          <a:xfrm xmlns:a="http://schemas.openxmlformats.org/drawingml/2006/main">
+            <a:off x="857250" y="1219200"/>
+            <a:ext cx="10477500" cy="742950"/>
           </a:xfrm>
           <a:prstGeom xmlns:a="http://schemas.openxmlformats.org/drawingml/2006/main" prst="rect">
             <a:avLst/>
@@ -8239,7 +8239,7 @@
           <a:lstStyle xmlns:a="http://schemas.openxmlformats.org/drawingml/2006/main"/>
           <a:p xmlns:a="http://schemas.openxmlformats.org/drawingml/2006/main">
             <a:pPr algn="ctr">
-              <a:defRPr sz="2175" b="1">
+              <a:defRPr sz="2100" b="1">
                 <a:solidFill>
                   <a:srgbClr val="17253A"/>
                 </a:solidFill>
@@ -8249,7 +8249,7 @@
               </a:defRPr>
             </a:pPr>
             <a:r>
-              <a:rPr sz="2175" b="1">
+              <a:rPr sz="2100" b="1">
                 <a:solidFill>
                   <a:srgbClr val="17253A"/>
                 </a:solidFill>
@@ -8267,28 +8267,30 @@
           <p:cNvPr id="11" name="">
             <a:extLst xmlns:a="http://schemas.openxmlformats.org/drawingml/2006/main">
               <a:ext uri="{FF2B5EF4-FFF2-40B4-BE49-F238E27FC236}">
-                <a16:creationId xmlns:a16="http://schemas.microsoft.com/office/drawing/2014/main" id="{C0E930C2-0455-4799-B8FB-DC6D00EB9D37}"/>
-              </a:ext>
-            </a:extLst>
-          </p:cNvPr>
-          <p:cNvSpPr>
-            <a:spLocks xmlns:a="http://schemas.openxmlformats.org/drawingml/2006/main" noGrp="1"/>
-          </p:cNvSpPr>
-          <p:nvPr/>
-        </p:nvSpPr>
-        <p:spPr>
-          <a:xfrm xmlns:a="http://schemas.openxmlformats.org/drawingml/2006/main">
-            <a:off x="1000125" y="2247900"/>
-            <a:ext cx="476250" cy="476250"/>
-          </a:xfrm>
-          <a:prstGeom xmlns:a="http://schemas.openxmlformats.org/drawingml/2006/main" prst="ellipse">
+                <a16:creationId xmlns:a16="http://schemas.microsoft.com/office/drawing/2014/main" id="{4F94C005-762A-4D38-A02D-4BAB99C7F69D}"/>
+              </a:ext>
+            </a:extLst>
+          </p:cNvPr>
+          <p:cNvSpPr>
+            <a:spLocks xmlns:a="http://schemas.openxmlformats.org/drawingml/2006/main" noGrp="1"/>
+          </p:cNvSpPr>
+          <p:nvPr/>
+        </p:nvSpPr>
+        <p:spPr>
+          <a:xfrm xmlns:a="http://schemas.openxmlformats.org/drawingml/2006/main">
+            <a:off x="971550" y="2124075"/>
+            <a:ext cx="38100" cy="3524250"/>
+          </a:xfrm>
+          <a:prstGeom xmlns:a="http://schemas.openxmlformats.org/drawingml/2006/main" prst="rect">
             <a:avLst/>
           </a:prstGeom>
           <a:solidFill xmlns:a="http://schemas.openxmlformats.org/drawingml/2006/main">
-            <a:srgbClr val="18324A"/>
+            <a:srgbClr val="2C6E73"/>
           </a:solidFill>
           <a:ln xmlns:a="http://schemas.openxmlformats.org/drawingml/2006/main" w="0">
-            <a:noFill/>
+            <a:solidFill>
+              <a:srgbClr val="2C6E73"/>
+            </a:solidFill>
           </a:ln>
         </p:spPr>
       </p:sp>
@@ -8297,19 +8299,19 @@
           <p:cNvPr id="12" name="">
             <a:extLst xmlns:a="http://schemas.openxmlformats.org/drawingml/2006/main">
               <a:ext uri="{FF2B5EF4-FFF2-40B4-BE49-F238E27FC236}">
-                <a16:creationId xmlns:a16="http://schemas.microsoft.com/office/drawing/2014/main" id="{4F0C0FF6-29E3-49CD-9235-B950832962AA}"/>
-              </a:ext>
-            </a:extLst>
-          </p:cNvPr>
-          <p:cNvSpPr>
-            <a:spLocks xmlns:a="http://schemas.openxmlformats.org/drawingml/2006/main" noGrp="1"/>
-          </p:cNvSpPr>
-          <p:nvPr/>
-        </p:nvSpPr>
-        <p:spPr>
-          <a:xfrm xmlns:a="http://schemas.openxmlformats.org/drawingml/2006/main">
-            <a:off x="1000125" y="2276475"/>
-            <a:ext cx="476250" cy="419100"/>
+                <a16:creationId xmlns:a16="http://schemas.microsoft.com/office/drawing/2014/main" id="{43A117B9-4785-46CB-8D19-F8257503BAEA}"/>
+              </a:ext>
+            </a:extLst>
+          </p:cNvPr>
+          <p:cNvSpPr>
+            <a:spLocks xmlns:a="http://schemas.openxmlformats.org/drawingml/2006/main" noGrp="1"/>
+          </p:cNvSpPr>
+          <p:nvPr/>
+        </p:nvSpPr>
+        <p:spPr>
+          <a:xfrm xmlns:a="http://schemas.openxmlformats.org/drawingml/2006/main">
+            <a:off x="1162050" y="2200275"/>
+            <a:ext cx="400050" cy="400050"/>
           </a:xfrm>
           <a:prstGeom xmlns:a="http://schemas.openxmlformats.org/drawingml/2006/main" prst="rect">
             <a:avLst/>
@@ -8326,9 +8328,9 @@
           <a:lstStyle xmlns:a="http://schemas.openxmlformats.org/drawingml/2006/main"/>
           <a:p xmlns:a="http://schemas.openxmlformats.org/drawingml/2006/main">
             <a:pPr algn="ctr">
-              <a:defRPr sz="1350" b="1">
-                <a:solidFill>
-                  <a:srgbClr val="FFFFFF"/>
+              <a:defRPr sz="1125" b="1">
+                <a:solidFill>
+                  <a:srgbClr val="2C6E73"/>
                 </a:solidFill>
                 <a:latin typeface="Arial"/>
                 <a:ea typeface="Arial"/>
@@ -8336,9 +8338,9 @@
               </a:defRPr>
             </a:pPr>
             <a:r>
-              <a:rPr sz="1350" b="1">
-                <a:solidFill>
-                  <a:srgbClr val="FFFFFF"/>
+              <a:rPr sz="1125" b="1">
+                <a:solidFill>
+                  <a:srgbClr val="2C6E73"/>
                 </a:solidFill>
                 <a:latin typeface="Arial"/>
                 <a:ea typeface="Arial"/>
@@ -8354,19 +8356,19 @@
           <p:cNvPr id="13" name="">
             <a:extLst xmlns:a="http://schemas.openxmlformats.org/drawingml/2006/main">
               <a:ext uri="{FF2B5EF4-FFF2-40B4-BE49-F238E27FC236}">
-                <a16:creationId xmlns:a16="http://schemas.microsoft.com/office/drawing/2014/main" id="{FA193D25-F0BD-422E-B461-E9CB8AE6927D}"/>
-              </a:ext>
-            </a:extLst>
-          </p:cNvPr>
-          <p:cNvSpPr>
-            <a:spLocks xmlns:a="http://schemas.openxmlformats.org/drawingml/2006/main" noGrp="1"/>
-          </p:cNvSpPr>
-          <p:nvPr/>
-        </p:nvSpPr>
-        <p:spPr>
-          <a:xfrm xmlns:a="http://schemas.openxmlformats.org/drawingml/2006/main">
-            <a:off x="1714500" y="2181225"/>
-            <a:ext cx="9429750" cy="609600"/>
+                <a16:creationId xmlns:a16="http://schemas.microsoft.com/office/drawing/2014/main" id="{801F94F7-0C92-452B-B9E7-6A18FC6BB050}"/>
+              </a:ext>
+            </a:extLst>
+          </p:cNvPr>
+          <p:cNvSpPr>
+            <a:spLocks xmlns:a="http://schemas.openxmlformats.org/drawingml/2006/main" noGrp="1"/>
+          </p:cNvSpPr>
+          <p:nvPr/>
+        </p:nvSpPr>
+        <p:spPr>
+          <a:xfrm xmlns:a="http://schemas.openxmlformats.org/drawingml/2006/main">
+            <a:off x="1714500" y="2114550"/>
+            <a:ext cx="9525000" cy="809625"/>
           </a:xfrm>
           <a:prstGeom xmlns:a="http://schemas.openxmlformats.org/drawingml/2006/main" prst="rect">
             <a:avLst/>
@@ -8383,7 +8385,7 @@
           <a:lstStyle xmlns:a="http://schemas.openxmlformats.org/drawingml/2006/main"/>
           <a:p xmlns:a="http://schemas.openxmlformats.org/drawingml/2006/main">
             <a:pPr algn="l">
-              <a:defRPr sz="1500" b="0">
+              <a:defRPr sz="1725" b="0">
                 <a:solidFill>
                   <a:srgbClr val="17253A"/>
                 </a:solidFill>
@@ -8393,7 +8395,7 @@
               </a:defRPr>
             </a:pPr>
             <a:r>
-              <a:rPr sz="1500" b="0">
+              <a:rPr sz="1725" b="0">
                 <a:solidFill>
                   <a:srgbClr val="17253A"/>
                 </a:solidFill>
@@ -8401,7 +8403,7 @@
                 <a:ea typeface="Arial"/>
                 <a:cs typeface="Arial"/>
               </a:rPr>
-              <a:t>Identify the structure: State whether the task concerns factors or multiples.</a:t>
+              <a:t>6 = 2 × 3     8 = 2³     9 = 3²</a:t>
             </a:r>
           </a:p>
         </p:txBody>
@@ -8411,28 +8413,30 @@
           <p:cNvPr id="14" name="">
             <a:extLst xmlns:a="http://schemas.openxmlformats.org/drawingml/2006/main">
               <a:ext uri="{FF2B5EF4-FFF2-40B4-BE49-F238E27FC236}">
-                <a16:creationId xmlns:a16="http://schemas.microsoft.com/office/drawing/2014/main" id="{D016859A-791D-44EA-A182-42EDF27DA18E}"/>
-              </a:ext>
-            </a:extLst>
-          </p:cNvPr>
-          <p:cNvSpPr>
-            <a:spLocks xmlns:a="http://schemas.openxmlformats.org/drawingml/2006/main" noGrp="1"/>
-          </p:cNvSpPr>
-          <p:nvPr/>
-        </p:nvSpPr>
-        <p:spPr>
-          <a:xfrm xmlns:a="http://schemas.openxmlformats.org/drawingml/2006/main">
-            <a:off x="1000125" y="2990850"/>
-            <a:ext cx="476250" cy="476250"/>
-          </a:xfrm>
-          <a:prstGeom xmlns:a="http://schemas.openxmlformats.org/drawingml/2006/main" prst="ellipse">
+                <a16:creationId xmlns:a16="http://schemas.microsoft.com/office/drawing/2014/main" id="{B19D65DF-BC6A-415C-BC9D-44F3417F727F}"/>
+              </a:ext>
+            </a:extLst>
+          </p:cNvPr>
+          <p:cNvSpPr>
+            <a:spLocks xmlns:a="http://schemas.openxmlformats.org/drawingml/2006/main" noGrp="1"/>
+          </p:cNvSpPr>
+          <p:nvPr/>
+        </p:nvSpPr>
+        <p:spPr>
+          <a:xfrm xmlns:a="http://schemas.openxmlformats.org/drawingml/2006/main">
+            <a:off x="1714500" y="2943225"/>
+            <a:ext cx="9334500" cy="9525"/>
+          </a:xfrm>
+          <a:prstGeom xmlns:a="http://schemas.openxmlformats.org/drawingml/2006/main" prst="rect">
             <a:avLst/>
           </a:prstGeom>
           <a:solidFill xmlns:a="http://schemas.openxmlformats.org/drawingml/2006/main">
-            <a:srgbClr val="2C6E73"/>
+            <a:srgbClr val="D9E0E6"/>
           </a:solidFill>
           <a:ln xmlns:a="http://schemas.openxmlformats.org/drawingml/2006/main" w="0">
-            <a:noFill/>
+            <a:solidFill>
+              <a:srgbClr val="D9E0E6"/>
+            </a:solidFill>
           </a:ln>
         </p:spPr>
       </p:sp>
@@ -8441,19 +8445,19 @@
           <p:cNvPr id="15" name="">
             <a:extLst xmlns:a="http://schemas.openxmlformats.org/drawingml/2006/main">
               <a:ext uri="{FF2B5EF4-FFF2-40B4-BE49-F238E27FC236}">
-                <a16:creationId xmlns:a16="http://schemas.microsoft.com/office/drawing/2014/main" id="{947C7914-92A8-4AEE-8117-1DDFDCCD7AF5}"/>
-              </a:ext>
-            </a:extLst>
-          </p:cNvPr>
-          <p:cNvSpPr>
-            <a:spLocks xmlns:a="http://schemas.openxmlformats.org/drawingml/2006/main" noGrp="1"/>
-          </p:cNvSpPr>
-          <p:nvPr/>
-        </p:nvSpPr>
-        <p:spPr>
-          <a:xfrm xmlns:a="http://schemas.openxmlformats.org/drawingml/2006/main">
-            <a:off x="1000125" y="3019425"/>
-            <a:ext cx="476250" cy="419100"/>
+                <a16:creationId xmlns:a16="http://schemas.microsoft.com/office/drawing/2014/main" id="{07964691-B014-4FC4-B55F-09B011B6FA10}"/>
+              </a:ext>
+            </a:extLst>
+          </p:cNvPr>
+          <p:cNvSpPr>
+            <a:spLocks xmlns:a="http://schemas.openxmlformats.org/drawingml/2006/main" noGrp="1"/>
+          </p:cNvSpPr>
+          <p:nvPr/>
+        </p:nvSpPr>
+        <p:spPr>
+          <a:xfrm xmlns:a="http://schemas.openxmlformats.org/drawingml/2006/main">
+            <a:off x="1162050" y="3076575"/>
+            <a:ext cx="400050" cy="400050"/>
           </a:xfrm>
           <a:prstGeom xmlns:a="http://schemas.openxmlformats.org/drawingml/2006/main" prst="rect">
             <a:avLst/>
@@ -8470,9 +8474,9 @@
           <a:lstStyle xmlns:a="http://schemas.openxmlformats.org/drawingml/2006/main"/>
           <a:p xmlns:a="http://schemas.openxmlformats.org/drawingml/2006/main">
             <a:pPr algn="ctr">
-              <a:defRPr sz="1350" b="1">
-                <a:solidFill>
-                  <a:srgbClr val="FFFFFF"/>
+              <a:defRPr sz="1125" b="1">
+                <a:solidFill>
+                  <a:srgbClr val="2C6E73"/>
                 </a:solidFill>
                 <a:latin typeface="Arial"/>
                 <a:ea typeface="Arial"/>
@@ -8480,9 +8484,9 @@
               </a:defRPr>
             </a:pPr>
             <a:r>
-              <a:rPr sz="1350" b="1">
-                <a:solidFill>
-                  <a:srgbClr val="FFFFFF"/>
+              <a:rPr sz="1125" b="1">
+                <a:solidFill>
+                  <a:srgbClr val="2C6E73"/>
                 </a:solidFill>
                 <a:latin typeface="Arial"/>
                 <a:ea typeface="Arial"/>
@@ -8498,19 +8502,19 @@
           <p:cNvPr id="16" name="">
             <a:extLst xmlns:a="http://schemas.openxmlformats.org/drawingml/2006/main">
               <a:ext uri="{FF2B5EF4-FFF2-40B4-BE49-F238E27FC236}">
-                <a16:creationId xmlns:a16="http://schemas.microsoft.com/office/drawing/2014/main" id="{535269A6-3FA9-4177-8734-3C6CCB5D6BA4}"/>
-              </a:ext>
-            </a:extLst>
-          </p:cNvPr>
-          <p:cNvSpPr>
-            <a:spLocks xmlns:a="http://schemas.openxmlformats.org/drawingml/2006/main" noGrp="1"/>
-          </p:cNvSpPr>
-          <p:nvPr/>
-        </p:nvSpPr>
-        <p:spPr>
-          <a:xfrm xmlns:a="http://schemas.openxmlformats.org/drawingml/2006/main">
-            <a:off x="1714500" y="2924175"/>
-            <a:ext cx="9429750" cy="609600"/>
+                <a16:creationId xmlns:a16="http://schemas.microsoft.com/office/drawing/2014/main" id="{06C316DE-9E04-40FA-B68C-2B221F8F5234}"/>
+              </a:ext>
+            </a:extLst>
+          </p:cNvPr>
+          <p:cNvSpPr>
+            <a:spLocks xmlns:a="http://schemas.openxmlformats.org/drawingml/2006/main" noGrp="1"/>
+          </p:cNvSpPr>
+          <p:nvPr/>
+        </p:nvSpPr>
+        <p:spPr>
+          <a:xfrm xmlns:a="http://schemas.openxmlformats.org/drawingml/2006/main">
+            <a:off x="1714500" y="2990850"/>
+            <a:ext cx="9525000" cy="809625"/>
           </a:xfrm>
           <a:prstGeom xmlns:a="http://schemas.openxmlformats.org/drawingml/2006/main" prst="rect">
             <a:avLst/>
@@ -8527,7 +8531,7 @@
           <a:lstStyle xmlns:a="http://schemas.openxmlformats.org/drawingml/2006/main"/>
           <a:p xmlns:a="http://schemas.openxmlformats.org/drawingml/2006/main">
             <a:pPr algn="l">
-              <a:defRPr sz="1500" b="0">
+              <a:defRPr sz="1725" b="0">
                 <a:solidFill>
                   <a:srgbClr val="17253A"/>
                 </a:solidFill>
@@ -8537,7 +8541,7 @@
               </a:defRPr>
             </a:pPr>
             <a:r>
-              <a:rPr sz="1500" b="0">
+              <a:rPr sz="1725" b="0">
                 <a:solidFill>
                   <a:srgbClr val="17253A"/>
                 </a:solidFill>
@@ -8545,7 +8549,7 @@
                 <a:ea typeface="Arial"/>
                 <a:cs typeface="Arial"/>
               </a:rPr>
-              <a:t>Set up the method: Work systematically from the smallest possible factor or multiple.</a:t>
+              <a:t>Use the greatest power of each prime</a:t>
             </a:r>
           </a:p>
         </p:txBody>
@@ -8555,28 +8559,30 @@
           <p:cNvPr id="17" name="">
             <a:extLst xmlns:a="http://schemas.openxmlformats.org/drawingml/2006/main">
               <a:ext uri="{FF2B5EF4-FFF2-40B4-BE49-F238E27FC236}">
-                <a16:creationId xmlns:a16="http://schemas.microsoft.com/office/drawing/2014/main" id="{602D7C96-BEE9-423F-A9DF-CA8ECCEFF088}"/>
-              </a:ext>
-            </a:extLst>
-          </p:cNvPr>
-          <p:cNvSpPr>
-            <a:spLocks xmlns:a="http://schemas.openxmlformats.org/drawingml/2006/main" noGrp="1"/>
-          </p:cNvSpPr>
-          <p:nvPr/>
-        </p:nvSpPr>
-        <p:spPr>
-          <a:xfrm xmlns:a="http://schemas.openxmlformats.org/drawingml/2006/main">
-            <a:off x="1000125" y="3733800"/>
-            <a:ext cx="476250" cy="476250"/>
-          </a:xfrm>
-          <a:prstGeom xmlns:a="http://schemas.openxmlformats.org/drawingml/2006/main" prst="ellipse">
+                <a16:creationId xmlns:a16="http://schemas.microsoft.com/office/drawing/2014/main" id="{097C6B0E-C32B-4C9D-A850-995675395476}"/>
+              </a:ext>
+            </a:extLst>
+          </p:cNvPr>
+          <p:cNvSpPr>
+            <a:spLocks xmlns:a="http://schemas.openxmlformats.org/drawingml/2006/main" noGrp="1"/>
+          </p:cNvSpPr>
+          <p:nvPr/>
+        </p:nvSpPr>
+        <p:spPr>
+          <a:xfrm xmlns:a="http://schemas.openxmlformats.org/drawingml/2006/main">
+            <a:off x="1714500" y="3819525"/>
+            <a:ext cx="9334500" cy="9525"/>
+          </a:xfrm>
+          <a:prstGeom xmlns:a="http://schemas.openxmlformats.org/drawingml/2006/main" prst="rect">
             <a:avLst/>
           </a:prstGeom>
           <a:solidFill xmlns:a="http://schemas.openxmlformats.org/drawingml/2006/main">
-            <a:srgbClr val="2C6E73"/>
+            <a:srgbClr val="D9E0E6"/>
           </a:solidFill>
           <a:ln xmlns:a="http://schemas.openxmlformats.org/drawingml/2006/main" w="0">
-            <a:noFill/>
+            <a:solidFill>
+              <a:srgbClr val="D9E0E6"/>
+            </a:solidFill>
           </a:ln>
         </p:spPr>
       </p:sp>
@@ -8585,19 +8591,19 @@
           <p:cNvPr id="18" name="">
             <a:extLst xmlns:a="http://schemas.openxmlformats.org/drawingml/2006/main">
               <a:ext uri="{FF2B5EF4-FFF2-40B4-BE49-F238E27FC236}">
-                <a16:creationId xmlns:a16="http://schemas.microsoft.com/office/drawing/2014/main" id="{3A1D4860-FD54-46C8-A3B7-20F2E28D5D2F}"/>
-              </a:ext>
-            </a:extLst>
-          </p:cNvPr>
-          <p:cNvSpPr>
-            <a:spLocks xmlns:a="http://schemas.openxmlformats.org/drawingml/2006/main" noGrp="1"/>
-          </p:cNvSpPr>
-          <p:nvPr/>
-        </p:nvSpPr>
-        <p:spPr>
-          <a:xfrm xmlns:a="http://schemas.openxmlformats.org/drawingml/2006/main">
-            <a:off x="1000125" y="3762375"/>
-            <a:ext cx="476250" cy="419100"/>
+                <a16:creationId xmlns:a16="http://schemas.microsoft.com/office/drawing/2014/main" id="{F5DF0FEF-9F21-4433-887C-2FD5021E8F0C}"/>
+              </a:ext>
+            </a:extLst>
+          </p:cNvPr>
+          <p:cNvSpPr>
+            <a:spLocks xmlns:a="http://schemas.openxmlformats.org/drawingml/2006/main" noGrp="1"/>
+          </p:cNvSpPr>
+          <p:nvPr/>
+        </p:nvSpPr>
+        <p:spPr>
+          <a:xfrm xmlns:a="http://schemas.openxmlformats.org/drawingml/2006/main">
+            <a:off x="1162050" y="3952875"/>
+            <a:ext cx="400050" cy="400050"/>
           </a:xfrm>
           <a:prstGeom xmlns:a="http://schemas.openxmlformats.org/drawingml/2006/main" prst="rect">
             <a:avLst/>
@@ -8614,9 +8620,9 @@
           <a:lstStyle xmlns:a="http://schemas.openxmlformats.org/drawingml/2006/main"/>
           <a:p xmlns:a="http://schemas.openxmlformats.org/drawingml/2006/main">
             <a:pPr algn="ctr">
-              <a:defRPr sz="1350" b="1">
-                <a:solidFill>
-                  <a:srgbClr val="FFFFFF"/>
+              <a:defRPr sz="1125" b="1">
+                <a:solidFill>
+                  <a:srgbClr val="2C6E73"/>
                 </a:solidFill>
                 <a:latin typeface="Arial"/>
                 <a:ea typeface="Arial"/>
@@ -8624,9 +8630,9 @@
               </a:defRPr>
             </a:pPr>
             <a:r>
-              <a:rPr sz="1350" b="1">
-                <a:solidFill>
-                  <a:srgbClr val="FFFFFF"/>
+              <a:rPr sz="1125" b="1">
+                <a:solidFill>
+                  <a:srgbClr val="2C6E73"/>
                 </a:solidFill>
                 <a:latin typeface="Arial"/>
                 <a:ea typeface="Arial"/>
@@ -8642,19 +8648,19 @@
           <p:cNvPr id="19" name="">
             <a:extLst xmlns:a="http://schemas.openxmlformats.org/drawingml/2006/main">
               <a:ext uri="{FF2B5EF4-FFF2-40B4-BE49-F238E27FC236}">
-                <a16:creationId xmlns:a16="http://schemas.microsoft.com/office/drawing/2014/main" id="{B0C79787-14B0-4E76-9920-5DE44217F113}"/>
-              </a:ext>
-            </a:extLst>
-          </p:cNvPr>
-          <p:cNvSpPr>
-            <a:spLocks xmlns:a="http://schemas.openxmlformats.org/drawingml/2006/main" noGrp="1"/>
-          </p:cNvSpPr>
-          <p:nvPr/>
-        </p:nvSpPr>
-        <p:spPr>
-          <a:xfrm xmlns:a="http://schemas.openxmlformats.org/drawingml/2006/main">
-            <a:off x="1714500" y="3667125"/>
-            <a:ext cx="9429750" cy="609600"/>
+                <a16:creationId xmlns:a16="http://schemas.microsoft.com/office/drawing/2014/main" id="{487F200B-ED93-4985-BDBB-19873A429957}"/>
+              </a:ext>
+            </a:extLst>
+          </p:cNvPr>
+          <p:cNvSpPr>
+            <a:spLocks xmlns:a="http://schemas.openxmlformats.org/drawingml/2006/main" noGrp="1"/>
+          </p:cNvSpPr>
+          <p:nvPr/>
+        </p:nvSpPr>
+        <p:spPr>
+          <a:xfrm xmlns:a="http://schemas.openxmlformats.org/drawingml/2006/main">
+            <a:off x="1714500" y="3867150"/>
+            <a:ext cx="9525000" cy="809625"/>
           </a:xfrm>
           <a:prstGeom xmlns:a="http://schemas.openxmlformats.org/drawingml/2006/main" prst="rect">
             <a:avLst/>
@@ -8671,7 +8677,7 @@
           <a:lstStyle xmlns:a="http://schemas.openxmlformats.org/drawingml/2006/main"/>
           <a:p xmlns:a="http://schemas.openxmlformats.org/drawingml/2006/main">
             <a:pPr algn="l">
-              <a:defRPr sz="1500" b="0">
+              <a:defRPr sz="1725" b="0">
                 <a:solidFill>
                   <a:srgbClr val="17253A"/>
                 </a:solidFill>
@@ -8681,7 +8687,7 @@
               </a:defRPr>
             </a:pPr>
             <a:r>
-              <a:rPr sz="1500" b="0">
+              <a:rPr sz="1725" b="0">
                 <a:solidFill>
                   <a:srgbClr val="17253A"/>
                 </a:solidFill>
@@ -8689,7 +8695,7 @@
                 <a:ea typeface="Arial"/>
                 <a:cs typeface="Arial"/>
               </a:rPr>
-              <a:t>Complete the calculation: 72.</a:t>
+              <a:t>2³ × 3² = 8 × 9</a:t>
             </a:r>
           </a:p>
         </p:txBody>
@@ -8699,28 +8705,30 @@
           <p:cNvPr id="20" name="">
             <a:extLst xmlns:a="http://schemas.openxmlformats.org/drawingml/2006/main">
               <a:ext uri="{FF2B5EF4-FFF2-40B4-BE49-F238E27FC236}">
-                <a16:creationId xmlns:a16="http://schemas.microsoft.com/office/drawing/2014/main" id="{EA09E391-C8BF-439B-BF46-72B6CFD1C499}"/>
-              </a:ext>
-            </a:extLst>
-          </p:cNvPr>
-          <p:cNvSpPr>
-            <a:spLocks xmlns:a="http://schemas.openxmlformats.org/drawingml/2006/main" noGrp="1"/>
-          </p:cNvSpPr>
-          <p:nvPr/>
-        </p:nvSpPr>
-        <p:spPr>
-          <a:xfrm xmlns:a="http://schemas.openxmlformats.org/drawingml/2006/main">
-            <a:off x="1000125" y="4476750"/>
-            <a:ext cx="476250" cy="476250"/>
-          </a:xfrm>
-          <a:prstGeom xmlns:a="http://schemas.openxmlformats.org/drawingml/2006/main" prst="ellipse">
+                <a16:creationId xmlns:a16="http://schemas.microsoft.com/office/drawing/2014/main" id="{20836931-B383-4E87-A3D4-E21C200C2FA0}"/>
+              </a:ext>
+            </a:extLst>
+          </p:cNvPr>
+          <p:cNvSpPr>
+            <a:spLocks xmlns:a="http://schemas.openxmlformats.org/drawingml/2006/main" noGrp="1"/>
+          </p:cNvSpPr>
+          <p:nvPr/>
+        </p:nvSpPr>
+        <p:spPr>
+          <a:xfrm xmlns:a="http://schemas.openxmlformats.org/drawingml/2006/main">
+            <a:off x="1714500" y="4695825"/>
+            <a:ext cx="9334500" cy="9525"/>
+          </a:xfrm>
+          <a:prstGeom xmlns:a="http://schemas.openxmlformats.org/drawingml/2006/main" prst="rect">
             <a:avLst/>
           </a:prstGeom>
           <a:solidFill xmlns:a="http://schemas.openxmlformats.org/drawingml/2006/main">
-            <a:srgbClr val="2C6E73"/>
+            <a:srgbClr val="D9E0E6"/>
           </a:solidFill>
           <a:ln xmlns:a="http://schemas.openxmlformats.org/drawingml/2006/main" w="0">
-            <a:noFill/>
+            <a:solidFill>
+              <a:srgbClr val="D9E0E6"/>
+            </a:solidFill>
           </a:ln>
         </p:spPr>
       </p:sp>
@@ -8729,19 +8737,19 @@
           <p:cNvPr id="21" name="">
             <a:extLst xmlns:a="http://schemas.openxmlformats.org/drawingml/2006/main">
               <a:ext uri="{FF2B5EF4-FFF2-40B4-BE49-F238E27FC236}">
-                <a16:creationId xmlns:a16="http://schemas.microsoft.com/office/drawing/2014/main" id="{AF7FE07B-9C6D-4D60-ACA1-6924304618EF}"/>
-              </a:ext>
-            </a:extLst>
-          </p:cNvPr>
-          <p:cNvSpPr>
-            <a:spLocks xmlns:a="http://schemas.openxmlformats.org/drawingml/2006/main" noGrp="1"/>
-          </p:cNvSpPr>
-          <p:nvPr/>
-        </p:nvSpPr>
-        <p:spPr>
-          <a:xfrm xmlns:a="http://schemas.openxmlformats.org/drawingml/2006/main">
-            <a:off x="1000125" y="4505325"/>
-            <a:ext cx="476250" cy="419100"/>
+                <a16:creationId xmlns:a16="http://schemas.microsoft.com/office/drawing/2014/main" id="{81F1C45B-5DAD-46F9-AB99-162A9EB351EB}"/>
+              </a:ext>
+            </a:extLst>
+          </p:cNvPr>
+          <p:cNvSpPr>
+            <a:spLocks xmlns:a="http://schemas.openxmlformats.org/drawingml/2006/main" noGrp="1"/>
+          </p:cNvSpPr>
+          <p:nvPr/>
+        </p:nvSpPr>
+        <p:spPr>
+          <a:xfrm xmlns:a="http://schemas.openxmlformats.org/drawingml/2006/main">
+            <a:off x="1162050" y="4829175"/>
+            <a:ext cx="400050" cy="400050"/>
           </a:xfrm>
           <a:prstGeom xmlns:a="http://schemas.openxmlformats.org/drawingml/2006/main" prst="rect">
             <a:avLst/>
@@ -8758,9 +8766,9 @@
           <a:lstStyle xmlns:a="http://schemas.openxmlformats.org/drawingml/2006/main"/>
           <a:p xmlns:a="http://schemas.openxmlformats.org/drawingml/2006/main">
             <a:pPr algn="ctr">
-              <a:defRPr sz="1350" b="1">
-                <a:solidFill>
-                  <a:srgbClr val="FFFFFF"/>
+              <a:defRPr sz="1125" b="1">
+                <a:solidFill>
+                  <a:srgbClr val="2F785D"/>
                 </a:solidFill>
                 <a:latin typeface="Arial"/>
                 <a:ea typeface="Arial"/>
@@ -8768,9 +8776,9 @@
               </a:defRPr>
             </a:pPr>
             <a:r>
-              <a:rPr sz="1350" b="1">
-                <a:solidFill>
-                  <a:srgbClr val="FFFFFF"/>
+              <a:rPr sz="1125" b="1">
+                <a:solidFill>
+                  <a:srgbClr val="2F785D"/>
                 </a:solidFill>
                 <a:latin typeface="Arial"/>
                 <a:ea typeface="Arial"/>
@@ -8786,19 +8794,19 @@
           <p:cNvPr id="22" name="">
             <a:extLst xmlns:a="http://schemas.openxmlformats.org/drawingml/2006/main">
               <a:ext uri="{FF2B5EF4-FFF2-40B4-BE49-F238E27FC236}">
-                <a16:creationId xmlns:a16="http://schemas.microsoft.com/office/drawing/2014/main" id="{085A89F1-ACE6-4828-ACC8-B94BBE7BBA19}"/>
-              </a:ext>
-            </a:extLst>
-          </p:cNvPr>
-          <p:cNvSpPr>
-            <a:spLocks xmlns:a="http://schemas.openxmlformats.org/drawingml/2006/main" noGrp="1"/>
-          </p:cNvSpPr>
-          <p:nvPr/>
-        </p:nvSpPr>
-        <p:spPr>
-          <a:xfrm xmlns:a="http://schemas.openxmlformats.org/drawingml/2006/main">
-            <a:off x="1714500" y="4410075"/>
-            <a:ext cx="9429750" cy="609600"/>
+                <a16:creationId xmlns:a16="http://schemas.microsoft.com/office/drawing/2014/main" id="{BB578429-2696-4B8B-A5FE-1EE7C0EDABA4}"/>
+              </a:ext>
+            </a:extLst>
+          </p:cNvPr>
+          <p:cNvSpPr>
+            <a:spLocks xmlns:a="http://schemas.openxmlformats.org/drawingml/2006/main" noGrp="1"/>
+          </p:cNvSpPr>
+          <p:nvPr/>
+        </p:nvSpPr>
+        <p:spPr>
+          <a:xfrm xmlns:a="http://schemas.openxmlformats.org/drawingml/2006/main">
+            <a:off x="1714500" y="4743450"/>
+            <a:ext cx="9525000" cy="809625"/>
           </a:xfrm>
           <a:prstGeom xmlns:a="http://schemas.openxmlformats.org/drawingml/2006/main" prst="rect">
             <a:avLst/>
@@ -8815,7 +8823,7 @@
           <a:lstStyle xmlns:a="http://schemas.openxmlformats.org/drawingml/2006/main"/>
           <a:p xmlns:a="http://schemas.openxmlformats.org/drawingml/2006/main">
             <a:pPr algn="l">
-              <a:defRPr sz="1500" b="1">
+              <a:defRPr sz="1725" b="1">
                 <a:solidFill>
                   <a:srgbClr val="2F785D"/>
                 </a:solidFill>
@@ -8825,7 +8833,7 @@
               </a:defRPr>
             </a:pPr>
             <a:r>
-              <a:rPr sz="1500" b="1">
+              <a:rPr sz="1725" b="1">
                 <a:solidFill>
                   <a:srgbClr val="2F785D"/>
                 </a:solidFill>
@@ -8833,7 +8841,7 @@
                 <a:ea typeface="Arial"/>
                 <a:cs typeface="Arial"/>
               </a:rPr>
-              <a:t>Check the result: Check that the list is complete and use it to justify the conclusion.</a:t>
+              <a:t>Smallest common multiple = 72</a:t>
             </a:r>
           </a:p>
         </p:txBody>
@@ -8841,7 +8849,7 @@
     </p:spTree>
     <p:extLst>
       <p:ext uri="{BB962C8B-B14F-4D97-AF65-F5344CB8AC3E}">
-        <p14:creationId xmlns:p14="http://schemas.microsoft.com/office/powerpoint/2010/main" val="901709684"/>
+        <p14:creationId xmlns:p14="http://schemas.microsoft.com/office/powerpoint/2010/main" val="281858050"/>
       </p:ext>
     </p:extLst>
   </p:cSld>
@@ -9134,7 +9142,7 @@
           <p:cNvPr id="15" name="">
             <a:extLst xmlns:a="http://schemas.openxmlformats.org/drawingml/2006/main">
               <a:ext uri="{FF2B5EF4-FFF2-40B4-BE49-F238E27FC236}">
-                <a16:creationId xmlns:a16="http://schemas.microsoft.com/office/drawing/2014/main" id="{DBF1D8C2-5E82-4044-B957-844613A7342F}"/>
+                <a16:creationId xmlns:a16="http://schemas.microsoft.com/office/drawing/2014/main" id="{2F38CC00-8B4F-4294-8065-32CC16A8266A}"/>
               </a:ext>
             </a:extLst>
           </p:cNvPr>
@@ -9166,7 +9174,7 @@
           <p:cNvPr id="2" name="">
             <a:extLst xmlns:a="http://schemas.openxmlformats.org/drawingml/2006/main">
               <a:ext uri="{FF2B5EF4-FFF2-40B4-BE49-F238E27FC236}">
-                <a16:creationId xmlns:a16="http://schemas.microsoft.com/office/drawing/2014/main" id="{E52E6D66-E31F-4E19-BC8E-06D5F8747CE3}"/>
+                <a16:creationId xmlns:a16="http://schemas.microsoft.com/office/drawing/2014/main" id="{FE0B9670-6B47-48EB-87C2-1668EBA4A2A9}"/>
               </a:ext>
             </a:extLst>
           </p:cNvPr>
@@ -9223,7 +9231,7 @@
           <p:cNvPr id="3" name="">
             <a:extLst xmlns:a="http://schemas.openxmlformats.org/drawingml/2006/main">
               <a:ext uri="{FF2B5EF4-FFF2-40B4-BE49-F238E27FC236}">
-                <a16:creationId xmlns:a16="http://schemas.microsoft.com/office/drawing/2014/main" id="{770098B5-110C-4F69-943D-227E30A7B86C}"/>
+                <a16:creationId xmlns:a16="http://schemas.microsoft.com/office/drawing/2014/main" id="{6C8375AB-CD9D-4155-B21E-5A9E252DDD01}"/>
               </a:ext>
             </a:extLst>
           </p:cNvPr>
@@ -9255,7 +9263,7 @@
           <p:cNvPr id="4" name="">
             <a:extLst xmlns:a="http://schemas.openxmlformats.org/drawingml/2006/main">
               <a:ext uri="{FF2B5EF4-FFF2-40B4-BE49-F238E27FC236}">
-                <a16:creationId xmlns:a16="http://schemas.microsoft.com/office/drawing/2014/main" id="{A5A0EADD-41AC-46F5-9327-ABCB320989B1}"/>
+                <a16:creationId xmlns:a16="http://schemas.microsoft.com/office/drawing/2014/main" id="{32580C1A-91B1-49AF-9E60-6C14B2CD60FB}"/>
               </a:ext>
             </a:extLst>
           </p:cNvPr>
@@ -9312,7 +9320,7 @@
           <p:cNvPr id="5" name="">
             <a:extLst xmlns:a="http://schemas.openxmlformats.org/drawingml/2006/main">
               <a:ext uri="{FF2B5EF4-FFF2-40B4-BE49-F238E27FC236}">
-                <a16:creationId xmlns:a16="http://schemas.microsoft.com/office/drawing/2014/main" id="{60089EE8-98AE-4FC9-BA41-17876FD534BC}"/>
+                <a16:creationId xmlns:a16="http://schemas.microsoft.com/office/drawing/2014/main" id="{665988F7-1A53-49B4-8A03-4C34AE2F6D12}"/>
               </a:ext>
             </a:extLst>
           </p:cNvPr>
@@ -9369,7 +9377,7 @@
           <p:cNvPr id="6" name="">
             <a:extLst xmlns:a="http://schemas.openxmlformats.org/drawingml/2006/main">
               <a:ext uri="{FF2B5EF4-FFF2-40B4-BE49-F238E27FC236}">
-                <a16:creationId xmlns:a16="http://schemas.microsoft.com/office/drawing/2014/main" id="{697D51A5-052D-4F4A-A648-74EB3FAA3112}"/>
+                <a16:creationId xmlns:a16="http://schemas.microsoft.com/office/drawing/2014/main" id="{0DCAE125-9A8F-4229-9A8B-689AA5F13438}"/>
               </a:ext>
             </a:extLst>
           </p:cNvPr>
@@ -9426,7 +9434,7 @@
           <p:cNvPr id="7" name="">
             <a:extLst xmlns:a="http://schemas.openxmlformats.org/drawingml/2006/main">
               <a:ext uri="{FF2B5EF4-FFF2-40B4-BE49-F238E27FC236}">
-                <a16:creationId xmlns:a16="http://schemas.microsoft.com/office/drawing/2014/main" id="{900C8241-2F1C-4BBB-8E8D-77623D1071A0}"/>
+                <a16:creationId xmlns:a16="http://schemas.microsoft.com/office/drawing/2014/main" id="{3D915F04-6A33-431B-BD46-5AD074EF734F}"/>
               </a:ext>
             </a:extLst>
           </p:cNvPr>
@@ -9458,7 +9466,7 @@
           <p:cNvPr id="8" name="">
             <a:extLst xmlns:a="http://schemas.openxmlformats.org/drawingml/2006/main">
               <a:ext uri="{FF2B5EF4-FFF2-40B4-BE49-F238E27FC236}">
-                <a16:creationId xmlns:a16="http://schemas.microsoft.com/office/drawing/2014/main" id="{D5CB2F63-1C51-4128-A533-0B3696A6427A}"/>
+                <a16:creationId xmlns:a16="http://schemas.microsoft.com/office/drawing/2014/main" id="{29C1CD4B-F070-4162-852D-F6C2C91EC79C}"/>
               </a:ext>
             </a:extLst>
           </p:cNvPr>
@@ -9515,7 +9523,7 @@
           <p:cNvPr id="9" name="">
             <a:extLst xmlns:a="http://schemas.openxmlformats.org/drawingml/2006/main">
               <a:ext uri="{FF2B5EF4-FFF2-40B4-BE49-F238E27FC236}">
-                <a16:creationId xmlns:a16="http://schemas.microsoft.com/office/drawing/2014/main" id="{CC92157D-F57F-448E-814B-20AC81F747ED}"/>
+                <a16:creationId xmlns:a16="http://schemas.microsoft.com/office/drawing/2014/main" id="{519AF9E7-5E98-44FD-818B-AAA57E1B51A1}"/>
               </a:ext>
             </a:extLst>
           </p:cNvPr>
@@ -9572,7 +9580,7 @@
           <p:cNvPr id="10" name="">
             <a:extLst xmlns:a="http://schemas.openxmlformats.org/drawingml/2006/main">
               <a:ext uri="{FF2B5EF4-FFF2-40B4-BE49-F238E27FC236}">
-                <a16:creationId xmlns:a16="http://schemas.microsoft.com/office/drawing/2014/main" id="{C775636C-2873-4300-B16F-CC4916C96881}"/>
+                <a16:creationId xmlns:a16="http://schemas.microsoft.com/office/drawing/2014/main" id="{43E9296F-8BAF-449F-B300-310035C66D51}"/>
               </a:ext>
             </a:extLst>
           </p:cNvPr>
@@ -9629,7 +9637,7 @@
           <p:cNvPr id="11" name="">
             <a:extLst xmlns:a="http://schemas.openxmlformats.org/drawingml/2006/main">
               <a:ext uri="{FF2B5EF4-FFF2-40B4-BE49-F238E27FC236}">
-                <a16:creationId xmlns:a16="http://schemas.microsoft.com/office/drawing/2014/main" id="{5CD16783-7FDD-427E-A91F-F17ED16AF9E1}"/>
+                <a16:creationId xmlns:a16="http://schemas.microsoft.com/office/drawing/2014/main" id="{8818A868-4F42-428B-9333-145DF40876A5}"/>
               </a:ext>
             </a:extLst>
           </p:cNvPr>
@@ -9686,7 +9694,7 @@
           <p:cNvPr id="12" name="">
             <a:extLst xmlns:a="http://schemas.openxmlformats.org/drawingml/2006/main">
               <a:ext uri="{FF2B5EF4-FFF2-40B4-BE49-F238E27FC236}">
-                <a16:creationId xmlns:a16="http://schemas.microsoft.com/office/drawing/2014/main" id="{8AF3C250-E9BF-44F0-BAB0-6257171F8BDC}"/>
+                <a16:creationId xmlns:a16="http://schemas.microsoft.com/office/drawing/2014/main" id="{54EE3A76-B04C-4959-84B5-7021107B3025}"/>
               </a:ext>
             </a:extLst>
           </p:cNvPr>
@@ -9718,7 +9726,7 @@
           <p:cNvPr id="13" name="">
             <a:extLst xmlns:a="http://schemas.openxmlformats.org/drawingml/2006/main">
               <a:ext uri="{FF2B5EF4-FFF2-40B4-BE49-F238E27FC236}">
-                <a16:creationId xmlns:a16="http://schemas.microsoft.com/office/drawing/2014/main" id="{4EB53C11-060E-4427-8E9F-F9C5B944CC32}"/>
+                <a16:creationId xmlns:a16="http://schemas.microsoft.com/office/drawing/2014/main" id="{797F9419-F2CD-4637-89C2-87371E1566A0}"/>
               </a:ext>
             </a:extLst>
           </p:cNvPr>
@@ -9775,7 +9783,7 @@
           <p:cNvPr id="14" name="">
             <a:extLst xmlns:a="http://schemas.openxmlformats.org/drawingml/2006/main">
               <a:ext uri="{FF2B5EF4-FFF2-40B4-BE49-F238E27FC236}">
-                <a16:creationId xmlns:a16="http://schemas.microsoft.com/office/drawing/2014/main" id="{9A06E306-B14F-4FC1-95AD-A7BE93FADA67}"/>
+                <a16:creationId xmlns:a16="http://schemas.microsoft.com/office/drawing/2014/main" id="{7AE970FC-8BB9-427D-B2CC-77836C894EDF}"/>
               </a:ext>
             </a:extLst>
           </p:cNvPr>
@@ -9830,7 +9838,7 @@
     </p:spTree>
     <p:extLst>
       <p:ext uri="{BB962C8B-B14F-4D97-AF65-F5344CB8AC3E}">
-        <p14:creationId xmlns:p14="http://schemas.microsoft.com/office/powerpoint/2010/main" val="1508503089"/>
+        <p14:creationId xmlns:p14="http://schemas.microsoft.com/office/powerpoint/2010/main" val="1350946234"/>
       </p:ext>
     </p:extLst>
   </p:cSld>
@@ -10031,7 +10039,7 @@
           <p:cNvPr id="16" name="">
             <a:extLst xmlns:a="http://schemas.openxmlformats.org/drawingml/2006/main">
               <a:ext uri="{FF2B5EF4-FFF2-40B4-BE49-F238E27FC236}">
-                <a16:creationId xmlns:a16="http://schemas.microsoft.com/office/drawing/2014/main" id="{7155635E-89E6-49E8-9C4A-8A567186F2ED}"/>
+                <a16:creationId xmlns:a16="http://schemas.microsoft.com/office/drawing/2014/main" id="{C997BFCF-78B6-465C-8C0F-0B8064A8A85A}"/>
               </a:ext>
             </a:extLst>
           </p:cNvPr>
@@ -10063,7 +10071,7 @@
           <p:cNvPr id="2" name="">
             <a:extLst xmlns:a="http://schemas.openxmlformats.org/drawingml/2006/main">
               <a:ext uri="{FF2B5EF4-FFF2-40B4-BE49-F238E27FC236}">
-                <a16:creationId xmlns:a16="http://schemas.microsoft.com/office/drawing/2014/main" id="{74228F6C-7D79-4FB4-802A-D8A9B987359C}"/>
+                <a16:creationId xmlns:a16="http://schemas.microsoft.com/office/drawing/2014/main" id="{315E2B02-9267-4379-8AFA-7686EEED14C6}"/>
               </a:ext>
             </a:extLst>
           </p:cNvPr>
@@ -10120,7 +10128,7 @@
           <p:cNvPr id="3" name="">
             <a:extLst xmlns:a="http://schemas.openxmlformats.org/drawingml/2006/main">
               <a:ext uri="{FF2B5EF4-FFF2-40B4-BE49-F238E27FC236}">
-                <a16:creationId xmlns:a16="http://schemas.microsoft.com/office/drawing/2014/main" id="{C4F44050-BAA8-493E-B2F8-412FE2D5B569}"/>
+                <a16:creationId xmlns:a16="http://schemas.microsoft.com/office/drawing/2014/main" id="{36F99D16-D390-400A-ACF8-3AF1179EB37B}"/>
               </a:ext>
             </a:extLst>
           </p:cNvPr>
@@ -10152,7 +10160,7 @@
           <p:cNvPr id="4" name="">
             <a:extLst xmlns:a="http://schemas.openxmlformats.org/drawingml/2006/main">
               <a:ext uri="{FF2B5EF4-FFF2-40B4-BE49-F238E27FC236}">
-                <a16:creationId xmlns:a16="http://schemas.microsoft.com/office/drawing/2014/main" id="{BB6CA5C7-576E-4FD1-9081-54909C02D4D1}"/>
+                <a16:creationId xmlns:a16="http://schemas.microsoft.com/office/drawing/2014/main" id="{95CA8459-F1C4-4D73-84B4-8A18930EF076}"/>
               </a:ext>
             </a:extLst>
           </p:cNvPr>
@@ -10209,7 +10217,7 @@
           <p:cNvPr id="5" name="">
             <a:extLst xmlns:a="http://schemas.openxmlformats.org/drawingml/2006/main">
               <a:ext uri="{FF2B5EF4-FFF2-40B4-BE49-F238E27FC236}">
-                <a16:creationId xmlns:a16="http://schemas.microsoft.com/office/drawing/2014/main" id="{74C838AB-0F7B-4D05-B789-2C66D6C98737}"/>
+                <a16:creationId xmlns:a16="http://schemas.microsoft.com/office/drawing/2014/main" id="{D4CDE4E2-D1F1-4F99-AF48-C122F51267DD}"/>
               </a:ext>
             </a:extLst>
           </p:cNvPr>
@@ -10266,7 +10274,7 @@
           <p:cNvPr id="6" name="">
             <a:extLst xmlns:a="http://schemas.openxmlformats.org/drawingml/2006/main">
               <a:ext uri="{FF2B5EF4-FFF2-40B4-BE49-F238E27FC236}">
-                <a16:creationId xmlns:a16="http://schemas.microsoft.com/office/drawing/2014/main" id="{842453B4-550E-4762-BEA0-45DBC665785C}"/>
+                <a16:creationId xmlns:a16="http://schemas.microsoft.com/office/drawing/2014/main" id="{08990CB1-5B4C-4712-AD47-3A57D677A9B7}"/>
               </a:ext>
             </a:extLst>
           </p:cNvPr>
@@ -10323,7 +10331,7 @@
           <p:cNvPr id="7" name="">
             <a:extLst xmlns:a="http://schemas.openxmlformats.org/drawingml/2006/main">
               <a:ext uri="{FF2B5EF4-FFF2-40B4-BE49-F238E27FC236}">
-                <a16:creationId xmlns:a16="http://schemas.microsoft.com/office/drawing/2014/main" id="{B51BDF79-1A57-4E46-AA46-AB7FA253BD7C}"/>
+                <a16:creationId xmlns:a16="http://schemas.microsoft.com/office/drawing/2014/main" id="{D1B02799-61B7-4850-8C36-0BBD235325D8}"/>
               </a:ext>
             </a:extLst>
           </p:cNvPr>
@@ -10355,7 +10363,7 @@
           <p:cNvPr id="8" name="">
             <a:extLst xmlns:a="http://schemas.openxmlformats.org/drawingml/2006/main">
               <a:ext uri="{FF2B5EF4-FFF2-40B4-BE49-F238E27FC236}">
-                <a16:creationId xmlns:a16="http://schemas.microsoft.com/office/drawing/2014/main" id="{02414AE4-9542-4F14-BD80-EEB1760D5468}"/>
+                <a16:creationId xmlns:a16="http://schemas.microsoft.com/office/drawing/2014/main" id="{11831DB6-3A9D-487C-AA64-3731F334C885}"/>
               </a:ext>
             </a:extLst>
           </p:cNvPr>
@@ -10412,7 +10420,7 @@
           <p:cNvPr id="9" name="">
             <a:extLst xmlns:a="http://schemas.openxmlformats.org/drawingml/2006/main">
               <a:ext uri="{FF2B5EF4-FFF2-40B4-BE49-F238E27FC236}">
-                <a16:creationId xmlns:a16="http://schemas.microsoft.com/office/drawing/2014/main" id="{98C4632C-3935-4BE6-A93D-3C78126FD178}"/>
+                <a16:creationId xmlns:a16="http://schemas.microsoft.com/office/drawing/2014/main" id="{4A07412E-17F1-48D8-BC15-DDE0D4E908C4}"/>
               </a:ext>
             </a:extLst>
           </p:cNvPr>
@@ -10469,7 +10477,7 @@
           <p:cNvPr id="10" name="">
             <a:extLst xmlns:a="http://schemas.openxmlformats.org/drawingml/2006/main">
               <a:ext uri="{FF2B5EF4-FFF2-40B4-BE49-F238E27FC236}">
-                <a16:creationId xmlns:a16="http://schemas.microsoft.com/office/drawing/2014/main" id="{2D8A88AB-8D87-4F8A-896F-4313A0253C8F}"/>
+                <a16:creationId xmlns:a16="http://schemas.microsoft.com/office/drawing/2014/main" id="{ACDA0825-08F0-49CB-81D5-6A479A38E176}"/>
               </a:ext>
             </a:extLst>
           </p:cNvPr>
@@ -10526,7 +10534,7 @@
           <p:cNvPr id="11" name="">
             <a:extLst xmlns:a="http://schemas.openxmlformats.org/drawingml/2006/main">
               <a:ext uri="{FF2B5EF4-FFF2-40B4-BE49-F238E27FC236}">
-                <a16:creationId xmlns:a16="http://schemas.microsoft.com/office/drawing/2014/main" id="{F532AE83-F80D-41E5-8902-227C1CACE8EF}"/>
+                <a16:creationId xmlns:a16="http://schemas.microsoft.com/office/drawing/2014/main" id="{2A2341A5-C09C-4F3A-9937-F8728A1F95E0}"/>
               </a:ext>
             </a:extLst>
           </p:cNvPr>
@@ -10583,7 +10591,7 @@
           <p:cNvPr id="12" name="">
             <a:extLst xmlns:a="http://schemas.openxmlformats.org/drawingml/2006/main">
               <a:ext uri="{FF2B5EF4-FFF2-40B4-BE49-F238E27FC236}">
-                <a16:creationId xmlns:a16="http://schemas.microsoft.com/office/drawing/2014/main" id="{03CC7DC9-56C6-4DAC-AB4A-DFF2A45C0BFB}"/>
+                <a16:creationId xmlns:a16="http://schemas.microsoft.com/office/drawing/2014/main" id="{64D7B225-B8ED-4036-AA84-4E9FCF492BDB}"/>
               </a:ext>
             </a:extLst>
           </p:cNvPr>
@@ -10640,7 +10648,7 @@
           <p:cNvPr id="13" name="">
             <a:extLst xmlns:a="http://schemas.openxmlformats.org/drawingml/2006/main">
               <a:ext uri="{FF2B5EF4-FFF2-40B4-BE49-F238E27FC236}">
-                <a16:creationId xmlns:a16="http://schemas.microsoft.com/office/drawing/2014/main" id="{0B8F1594-9A78-483C-A211-1A7E9E7390A9}"/>
+                <a16:creationId xmlns:a16="http://schemas.microsoft.com/office/drawing/2014/main" id="{7BF2D410-A8EC-4280-A68A-7B035916C8C3}"/>
               </a:ext>
             </a:extLst>
           </p:cNvPr>
@@ -10697,7 +10705,7 @@
           <p:cNvPr id="14" name="">
             <a:extLst xmlns:a="http://schemas.openxmlformats.org/drawingml/2006/main">
               <a:ext uri="{FF2B5EF4-FFF2-40B4-BE49-F238E27FC236}">
-                <a16:creationId xmlns:a16="http://schemas.microsoft.com/office/drawing/2014/main" id="{0D43B15D-6194-46DB-93E1-0EA471E8B26F}"/>
+                <a16:creationId xmlns:a16="http://schemas.microsoft.com/office/drawing/2014/main" id="{373CF4C2-CF93-4C9C-8B14-0F09B28CCC27}"/>
               </a:ext>
             </a:extLst>
           </p:cNvPr>
@@ -10754,7 +10762,7 @@
           <p:cNvPr id="15" name="">
             <a:extLst xmlns:a="http://schemas.openxmlformats.org/drawingml/2006/main">
               <a:ext uri="{FF2B5EF4-FFF2-40B4-BE49-F238E27FC236}">
-                <a16:creationId xmlns:a16="http://schemas.microsoft.com/office/drawing/2014/main" id="{F337CE14-60B9-40D2-99AE-D92A1703D5F5}"/>
+                <a16:creationId xmlns:a16="http://schemas.microsoft.com/office/drawing/2014/main" id="{E3EEFD47-0A27-4ED5-B0FB-683A59BE4EC0}"/>
               </a:ext>
             </a:extLst>
           </p:cNvPr>
@@ -10809,7 +10817,7 @@
     </p:spTree>
     <p:extLst>
       <p:ext uri="{BB962C8B-B14F-4D97-AF65-F5344CB8AC3E}">
-        <p14:creationId xmlns:p14="http://schemas.microsoft.com/office/powerpoint/2010/main" val="7451096"/>
+        <p14:creationId xmlns:p14="http://schemas.microsoft.com/office/powerpoint/2010/main" val="836749282"/>
       </p:ext>
     </p:extLst>
   </p:cSld>
@@ -10964,7 +10972,7 @@
           <p:cNvPr id="16" name="">
             <a:extLst xmlns:a="http://schemas.openxmlformats.org/drawingml/2006/main">
               <a:ext uri="{FF2B5EF4-FFF2-40B4-BE49-F238E27FC236}">
-                <a16:creationId xmlns:a16="http://schemas.microsoft.com/office/drawing/2014/main" id="{9F6D1869-A62A-462C-A765-CBB1001C864B}"/>
+                <a16:creationId xmlns:a16="http://schemas.microsoft.com/office/drawing/2014/main" id="{2B6FFCC4-8B57-491B-9A47-70B830FA0356}"/>
               </a:ext>
             </a:extLst>
           </p:cNvPr>
@@ -10996,7 +11004,7 @@
           <p:cNvPr id="2" name="">
             <a:extLst xmlns:a="http://schemas.openxmlformats.org/drawingml/2006/main">
               <a:ext uri="{FF2B5EF4-FFF2-40B4-BE49-F238E27FC236}">
-                <a16:creationId xmlns:a16="http://schemas.microsoft.com/office/drawing/2014/main" id="{B8FB691D-C3DC-479D-A52E-8C325EA790E0}"/>
+                <a16:creationId xmlns:a16="http://schemas.microsoft.com/office/drawing/2014/main" id="{9F03AD83-C828-48C8-B7FE-51DEF1065A6B}"/>
               </a:ext>
             </a:extLst>
           </p:cNvPr>
@@ -11053,7 +11061,7 @@
           <p:cNvPr id="3" name="">
             <a:extLst xmlns:a="http://schemas.openxmlformats.org/drawingml/2006/main">
               <a:ext uri="{FF2B5EF4-FFF2-40B4-BE49-F238E27FC236}">
-                <a16:creationId xmlns:a16="http://schemas.microsoft.com/office/drawing/2014/main" id="{B6E24135-7929-4BA0-9504-5132835229DD}"/>
+                <a16:creationId xmlns:a16="http://schemas.microsoft.com/office/drawing/2014/main" id="{4BFA7F50-7AFA-48D1-839F-A6EDB035CD97}"/>
               </a:ext>
             </a:extLst>
           </p:cNvPr>
@@ -11085,7 +11093,7 @@
           <p:cNvPr id="4" name="">
             <a:extLst xmlns:a="http://schemas.openxmlformats.org/drawingml/2006/main">
               <a:ext uri="{FF2B5EF4-FFF2-40B4-BE49-F238E27FC236}">
-                <a16:creationId xmlns:a16="http://schemas.microsoft.com/office/drawing/2014/main" id="{146266FA-E098-48E6-BE49-120328B21561}"/>
+                <a16:creationId xmlns:a16="http://schemas.microsoft.com/office/drawing/2014/main" id="{1523F0DE-81BC-4C49-A4B5-FE138A8430D1}"/>
               </a:ext>
             </a:extLst>
           </p:cNvPr>
@@ -11142,7 +11150,7 @@
           <p:cNvPr id="5" name="">
             <a:extLst xmlns:a="http://schemas.openxmlformats.org/drawingml/2006/main">
               <a:ext uri="{FF2B5EF4-FFF2-40B4-BE49-F238E27FC236}">
-                <a16:creationId xmlns:a16="http://schemas.microsoft.com/office/drawing/2014/main" id="{8D24F3A5-266F-49B5-821F-90B5C678CDE7}"/>
+                <a16:creationId xmlns:a16="http://schemas.microsoft.com/office/drawing/2014/main" id="{880807B4-6D76-4BBA-BBA1-026846AE55D9}"/>
               </a:ext>
             </a:extLst>
           </p:cNvPr>
@@ -11199,7 +11207,7 @@
           <p:cNvPr id="6" name="">
             <a:extLst xmlns:a="http://schemas.openxmlformats.org/drawingml/2006/main">
               <a:ext uri="{FF2B5EF4-FFF2-40B4-BE49-F238E27FC236}">
-                <a16:creationId xmlns:a16="http://schemas.microsoft.com/office/drawing/2014/main" id="{569BF862-85AE-4BF6-B28E-9EF72CFF2B57}"/>
+                <a16:creationId xmlns:a16="http://schemas.microsoft.com/office/drawing/2014/main" id="{876DC4C0-11A5-40B9-8569-DF0191530AEF}"/>
               </a:ext>
             </a:extLst>
           </p:cNvPr>
@@ -11256,7 +11264,7 @@
           <p:cNvPr id="7" name="">
             <a:extLst xmlns:a="http://schemas.openxmlformats.org/drawingml/2006/main">
               <a:ext uri="{FF2B5EF4-FFF2-40B4-BE49-F238E27FC236}">
-                <a16:creationId xmlns:a16="http://schemas.microsoft.com/office/drawing/2014/main" id="{4A54305E-286E-4838-9D7C-8151B7310D80}"/>
+                <a16:creationId xmlns:a16="http://schemas.microsoft.com/office/drawing/2014/main" id="{2E75F296-CC3D-44A8-8581-E1014347C9F2}"/>
               </a:ext>
             </a:extLst>
           </p:cNvPr>
@@ -11288,7 +11296,7 @@
           <p:cNvPr id="8" name="">
             <a:extLst xmlns:a="http://schemas.openxmlformats.org/drawingml/2006/main">
               <a:ext uri="{FF2B5EF4-FFF2-40B4-BE49-F238E27FC236}">
-                <a16:creationId xmlns:a16="http://schemas.microsoft.com/office/drawing/2014/main" id="{A880303A-2E5B-4EE8-9960-BB50621C2CA8}"/>
+                <a16:creationId xmlns:a16="http://schemas.microsoft.com/office/drawing/2014/main" id="{BBF428B2-0C23-4DFC-B64E-A5EA70F5670E}"/>
               </a:ext>
             </a:extLst>
           </p:cNvPr>
@@ -11345,7 +11353,7 @@
           <p:cNvPr id="9" name="">
             <a:extLst xmlns:a="http://schemas.openxmlformats.org/drawingml/2006/main">
               <a:ext uri="{FF2B5EF4-FFF2-40B4-BE49-F238E27FC236}">
-                <a16:creationId xmlns:a16="http://schemas.microsoft.com/office/drawing/2014/main" id="{1269A517-7B6C-4F67-B09C-A3C8D4633514}"/>
+                <a16:creationId xmlns:a16="http://schemas.microsoft.com/office/drawing/2014/main" id="{2D276138-2FCB-4556-88FA-66C8BF2E5C80}"/>
               </a:ext>
             </a:extLst>
           </p:cNvPr>
@@ -11406,7 +11414,7 @@
           <p:nvPr/>
         </p:nvPicPr>
         <p:blipFill>
-          <a:blip xmlns:r="http://schemas.openxmlformats.org/officeDocument/2006/relationships" xmlns:a="http://schemas.openxmlformats.org/drawingml/2006/main" r:embed="R3d566df40ad44a88"/>
+          <a:blip xmlns:r="http://schemas.openxmlformats.org/officeDocument/2006/relationships" xmlns:a="http://schemas.openxmlformats.org/drawingml/2006/main" r:embed="Rfe392202fe8a4b88"/>
           <a:stretch xmlns:a="http://schemas.openxmlformats.org/drawingml/2006/main"/>
         </p:blipFill>
         <p:spPr>
@@ -11424,7 +11432,7 @@
           <p:cNvPr id="11" name="">
             <a:extLst xmlns:a="http://schemas.openxmlformats.org/drawingml/2006/main">
               <a:ext uri="{FF2B5EF4-FFF2-40B4-BE49-F238E27FC236}">
-                <a16:creationId xmlns:a16="http://schemas.microsoft.com/office/drawing/2014/main" id="{BB1EEE7C-BFDC-44B7-BBF0-1A1DC738E191}"/>
+                <a16:creationId xmlns:a16="http://schemas.microsoft.com/office/drawing/2014/main" id="{3977F440-D7E2-4EC9-B482-2A5492EE4909}"/>
               </a:ext>
             </a:extLst>
           </p:cNvPr>
@@ -11481,7 +11489,7 @@
           <p:cNvPr id="12" name="">
             <a:extLst xmlns:a="http://schemas.openxmlformats.org/drawingml/2006/main">
               <a:ext uri="{FF2B5EF4-FFF2-40B4-BE49-F238E27FC236}">
-                <a16:creationId xmlns:a16="http://schemas.microsoft.com/office/drawing/2014/main" id="{EE1A03FD-EA10-4902-ADBC-BDC7F5FE9AAC}"/>
+                <a16:creationId xmlns:a16="http://schemas.microsoft.com/office/drawing/2014/main" id="{3CB1EF9A-F127-4A6A-A64B-14C20CD8FCAB}"/>
               </a:ext>
             </a:extLst>
           </p:cNvPr>
@@ -11538,7 +11546,7 @@
           <p:cNvPr id="13" name="">
             <a:extLst xmlns:a="http://schemas.openxmlformats.org/drawingml/2006/main">
               <a:ext uri="{FF2B5EF4-FFF2-40B4-BE49-F238E27FC236}">
-                <a16:creationId xmlns:a16="http://schemas.microsoft.com/office/drawing/2014/main" id="{8752AB8D-05F3-4062-A1F4-93782A5AAC87}"/>
+                <a16:creationId xmlns:a16="http://schemas.microsoft.com/office/drawing/2014/main" id="{7529795D-31A3-4204-A51D-5A501D08987D}"/>
               </a:ext>
             </a:extLst>
           </p:cNvPr>
@@ -11570,7 +11578,7 @@
           <p:cNvPr id="14" name="">
             <a:extLst xmlns:a="http://schemas.openxmlformats.org/drawingml/2006/main">
               <a:ext uri="{FF2B5EF4-FFF2-40B4-BE49-F238E27FC236}">
-                <a16:creationId xmlns:a16="http://schemas.microsoft.com/office/drawing/2014/main" id="{0F8435F0-F3DE-41B2-AFAA-E5D35DB33B19}"/>
+                <a16:creationId xmlns:a16="http://schemas.microsoft.com/office/drawing/2014/main" id="{5F7D7EF2-56FE-44AA-8F28-52697F36F4C6}"/>
               </a:ext>
             </a:extLst>
           </p:cNvPr>
@@ -11627,7 +11635,7 @@
           <p:cNvPr id="15" name="">
             <a:extLst xmlns:a="http://schemas.openxmlformats.org/drawingml/2006/main">
               <a:ext uri="{FF2B5EF4-FFF2-40B4-BE49-F238E27FC236}">
-                <a16:creationId xmlns:a16="http://schemas.microsoft.com/office/drawing/2014/main" id="{7BBB55DD-EA8A-430E-90BA-B5E91DBFFB5A}"/>
+                <a16:creationId xmlns:a16="http://schemas.microsoft.com/office/drawing/2014/main" id="{1F653BEE-56C8-4971-91BA-3180282ACB9C}"/>
               </a:ext>
             </a:extLst>
           </p:cNvPr>
@@ -11682,7 +11690,7 @@
     </p:spTree>
     <p:extLst>
       <p:ext uri="{BB962C8B-B14F-4D97-AF65-F5344CB8AC3E}">
-        <p14:creationId xmlns:p14="http://schemas.microsoft.com/office/powerpoint/2010/main" val="125927356"/>
+        <p14:creationId xmlns:p14="http://schemas.microsoft.com/office/powerpoint/2010/main" val="1126544964"/>
       </p:ext>
     </p:extLst>
   </p:cSld>
@@ -11837,7 +11845,7 @@
           <p:cNvPr id="23" name="">
             <a:extLst xmlns:a="http://schemas.openxmlformats.org/drawingml/2006/main">
               <a:ext uri="{FF2B5EF4-FFF2-40B4-BE49-F238E27FC236}">
-                <a16:creationId xmlns:a16="http://schemas.microsoft.com/office/drawing/2014/main" id="{5C2128B0-5D07-4A37-8695-9E7FB2DE4E24}"/>
+                <a16:creationId xmlns:a16="http://schemas.microsoft.com/office/drawing/2014/main" id="{95EDFC9B-9916-43B6-958E-B17F076F2DB9}"/>
               </a:ext>
             </a:extLst>
           </p:cNvPr>
@@ -11869,7 +11877,7 @@
           <p:cNvPr id="2" name="">
             <a:extLst xmlns:a="http://schemas.openxmlformats.org/drawingml/2006/main">
               <a:ext uri="{FF2B5EF4-FFF2-40B4-BE49-F238E27FC236}">
-                <a16:creationId xmlns:a16="http://schemas.microsoft.com/office/drawing/2014/main" id="{C75A8C75-B64A-435C-86E5-7F6A8A7A84B7}"/>
+                <a16:creationId xmlns:a16="http://schemas.microsoft.com/office/drawing/2014/main" id="{9D42DA5B-EE50-4392-88A1-F4B099F5C3E4}"/>
               </a:ext>
             </a:extLst>
           </p:cNvPr>
@@ -11926,7 +11934,7 @@
           <p:cNvPr id="3" name="">
             <a:extLst xmlns:a="http://schemas.openxmlformats.org/drawingml/2006/main">
               <a:ext uri="{FF2B5EF4-FFF2-40B4-BE49-F238E27FC236}">
-                <a16:creationId xmlns:a16="http://schemas.microsoft.com/office/drawing/2014/main" id="{8D910760-3798-4F88-AD0D-104F2A7864D5}"/>
+                <a16:creationId xmlns:a16="http://schemas.microsoft.com/office/drawing/2014/main" id="{8FD47BCB-EAA9-4B7B-AF66-4E3D84EEED54}"/>
               </a:ext>
             </a:extLst>
           </p:cNvPr>
@@ -11958,7 +11966,7 @@
           <p:cNvPr id="4" name="">
             <a:extLst xmlns:a="http://schemas.openxmlformats.org/drawingml/2006/main">
               <a:ext uri="{FF2B5EF4-FFF2-40B4-BE49-F238E27FC236}">
-                <a16:creationId xmlns:a16="http://schemas.microsoft.com/office/drawing/2014/main" id="{F86930D4-EAF7-41B7-9B6A-BCC05767F718}"/>
+                <a16:creationId xmlns:a16="http://schemas.microsoft.com/office/drawing/2014/main" id="{FDEC9A0E-BE84-42BD-B71B-838220BE33CD}"/>
               </a:ext>
             </a:extLst>
           </p:cNvPr>
@@ -12015,7 +12023,7 @@
           <p:cNvPr id="5" name="">
             <a:extLst xmlns:a="http://schemas.openxmlformats.org/drawingml/2006/main">
               <a:ext uri="{FF2B5EF4-FFF2-40B4-BE49-F238E27FC236}">
-                <a16:creationId xmlns:a16="http://schemas.microsoft.com/office/drawing/2014/main" id="{856700F6-3897-4C28-BA49-09F47F51799D}"/>
+                <a16:creationId xmlns:a16="http://schemas.microsoft.com/office/drawing/2014/main" id="{3C91A039-7820-479F-8174-D796F7DF24E1}"/>
               </a:ext>
             </a:extLst>
           </p:cNvPr>
@@ -12072,7 +12080,7 @@
           <p:cNvPr id="6" name="">
             <a:extLst xmlns:a="http://schemas.openxmlformats.org/drawingml/2006/main">
               <a:ext uri="{FF2B5EF4-FFF2-40B4-BE49-F238E27FC236}">
-                <a16:creationId xmlns:a16="http://schemas.microsoft.com/office/drawing/2014/main" id="{20456F4B-ACF4-4348-B238-0064B5E56FEE}"/>
+                <a16:creationId xmlns:a16="http://schemas.microsoft.com/office/drawing/2014/main" id="{06EA34C1-FAD8-4DE9-9C2D-5442B29B4B66}"/>
               </a:ext>
             </a:extLst>
           </p:cNvPr>
@@ -12129,7 +12137,7 @@
           <p:cNvPr id="7" name="">
             <a:extLst xmlns:a="http://schemas.openxmlformats.org/drawingml/2006/main">
               <a:ext uri="{FF2B5EF4-FFF2-40B4-BE49-F238E27FC236}">
-                <a16:creationId xmlns:a16="http://schemas.microsoft.com/office/drawing/2014/main" id="{7E383E77-259F-45E6-9F6F-61E46354AE86}"/>
+                <a16:creationId xmlns:a16="http://schemas.microsoft.com/office/drawing/2014/main" id="{54BCA384-B1BA-4BF6-A949-67E820A4BDE6}"/>
               </a:ext>
             </a:extLst>
           </p:cNvPr>
@@ -12161,7 +12169,7 @@
           <p:cNvPr id="8" name="">
             <a:extLst xmlns:a="http://schemas.openxmlformats.org/drawingml/2006/main">
               <a:ext uri="{FF2B5EF4-FFF2-40B4-BE49-F238E27FC236}">
-                <a16:creationId xmlns:a16="http://schemas.microsoft.com/office/drawing/2014/main" id="{A0BC9C73-0500-49E2-8C4C-9DF08305FCEB}"/>
+                <a16:creationId xmlns:a16="http://schemas.microsoft.com/office/drawing/2014/main" id="{5B0A5692-A108-42BD-A562-F39AE901EC48}"/>
               </a:ext>
             </a:extLst>
           </p:cNvPr>
@@ -12218,7 +12226,7 @@
           <p:cNvPr id="9" name="">
             <a:extLst xmlns:a="http://schemas.openxmlformats.org/drawingml/2006/main">
               <a:ext uri="{FF2B5EF4-FFF2-40B4-BE49-F238E27FC236}">
-                <a16:creationId xmlns:a16="http://schemas.microsoft.com/office/drawing/2014/main" id="{5A21EB13-4E16-4466-8726-07494884C7A0}"/>
+                <a16:creationId xmlns:a16="http://schemas.microsoft.com/office/drawing/2014/main" id="{34312304-FC6A-4BF0-A51A-F981FF88CDCC}"/>
               </a:ext>
             </a:extLst>
           </p:cNvPr>
@@ -12275,7 +12283,7 @@
           <p:cNvPr id="10" name="">
             <a:extLst xmlns:a="http://schemas.openxmlformats.org/drawingml/2006/main">
               <a:ext uri="{FF2B5EF4-FFF2-40B4-BE49-F238E27FC236}">
-                <a16:creationId xmlns:a16="http://schemas.microsoft.com/office/drawing/2014/main" id="{DBBAC519-DCB3-4D03-BF16-B45C53654C85}"/>
+                <a16:creationId xmlns:a16="http://schemas.microsoft.com/office/drawing/2014/main" id="{EF2BA6B3-6DFA-448A-B286-6DADC3DB2916}"/>
               </a:ext>
             </a:extLst>
           </p:cNvPr>
@@ -12309,7 +12317,7 @@
           <p:cNvPr id="11" name="">
             <a:extLst xmlns:a="http://schemas.openxmlformats.org/drawingml/2006/main">
               <a:ext uri="{FF2B5EF4-FFF2-40B4-BE49-F238E27FC236}">
-                <a16:creationId xmlns:a16="http://schemas.microsoft.com/office/drawing/2014/main" id="{ABE2680E-C0BE-4975-9468-CC635DF35EB2}"/>
+                <a16:creationId xmlns:a16="http://schemas.microsoft.com/office/drawing/2014/main" id="{1BCE2317-721C-4517-993E-35EB31416F88}"/>
               </a:ext>
             </a:extLst>
           </p:cNvPr>
@@ -12341,7 +12349,7 @@
           <p:cNvPr id="12" name="">
             <a:extLst xmlns:a="http://schemas.openxmlformats.org/drawingml/2006/main">
               <a:ext uri="{FF2B5EF4-FFF2-40B4-BE49-F238E27FC236}">
-                <a16:creationId xmlns:a16="http://schemas.microsoft.com/office/drawing/2014/main" id="{E8023063-8F9B-4F78-8FAC-2E66F1CD6ABC}"/>
+                <a16:creationId xmlns:a16="http://schemas.microsoft.com/office/drawing/2014/main" id="{1F661355-6268-4E93-AA79-FF3B2025B656}"/>
               </a:ext>
             </a:extLst>
           </p:cNvPr>
@@ -12398,7 +12406,7 @@
           <p:cNvPr id="13" name="">
             <a:extLst xmlns:a="http://schemas.openxmlformats.org/drawingml/2006/main">
               <a:ext uri="{FF2B5EF4-FFF2-40B4-BE49-F238E27FC236}">
-                <a16:creationId xmlns:a16="http://schemas.microsoft.com/office/drawing/2014/main" id="{C0B4E0AD-5B1A-4DE3-A161-C27D9FBB0FDA}"/>
+                <a16:creationId xmlns:a16="http://schemas.microsoft.com/office/drawing/2014/main" id="{2DF811B6-2277-48E4-AB2B-C87A1364C732}"/>
               </a:ext>
             </a:extLst>
           </p:cNvPr>
@@ -12455,7 +12463,7 @@
           <p:cNvPr id="14" name="">
             <a:extLst xmlns:a="http://schemas.openxmlformats.org/drawingml/2006/main">
               <a:ext uri="{FF2B5EF4-FFF2-40B4-BE49-F238E27FC236}">
-                <a16:creationId xmlns:a16="http://schemas.microsoft.com/office/drawing/2014/main" id="{0FE6B4BE-3D7B-4357-9777-A40C41E03FDD}"/>
+                <a16:creationId xmlns:a16="http://schemas.microsoft.com/office/drawing/2014/main" id="{F1D6A665-3931-440B-BB45-FE05042D9C6B}"/>
               </a:ext>
             </a:extLst>
           </p:cNvPr>
@@ -12489,7 +12497,7 @@
           <p:cNvPr id="15" name="">
             <a:extLst xmlns:a="http://schemas.openxmlformats.org/drawingml/2006/main">
               <a:ext uri="{FF2B5EF4-FFF2-40B4-BE49-F238E27FC236}">
-                <a16:creationId xmlns:a16="http://schemas.microsoft.com/office/drawing/2014/main" id="{A3092113-6912-4008-B471-7EED7D3C4B4C}"/>
+                <a16:creationId xmlns:a16="http://schemas.microsoft.com/office/drawing/2014/main" id="{5DF15957-3BC2-4A40-B0A0-BEE07EEE9288}"/>
               </a:ext>
             </a:extLst>
           </p:cNvPr>
@@ -12521,7 +12529,7 @@
           <p:cNvPr id="16" name="">
             <a:extLst xmlns:a="http://schemas.openxmlformats.org/drawingml/2006/main">
               <a:ext uri="{FF2B5EF4-FFF2-40B4-BE49-F238E27FC236}">
-                <a16:creationId xmlns:a16="http://schemas.microsoft.com/office/drawing/2014/main" id="{4C980E0D-F538-4FD7-A7FB-B87208173F53}"/>
+                <a16:creationId xmlns:a16="http://schemas.microsoft.com/office/drawing/2014/main" id="{E505108C-2116-4AD6-83EA-58662A3FC989}"/>
               </a:ext>
             </a:extLst>
           </p:cNvPr>
@@ -12578,7 +12586,7 @@
           <p:cNvPr id="17" name="">
             <a:extLst xmlns:a="http://schemas.openxmlformats.org/drawingml/2006/main">
               <a:ext uri="{FF2B5EF4-FFF2-40B4-BE49-F238E27FC236}">
-                <a16:creationId xmlns:a16="http://schemas.microsoft.com/office/drawing/2014/main" id="{C0B69EFA-4922-4575-9DCE-803ADF989C56}"/>
+                <a16:creationId xmlns:a16="http://schemas.microsoft.com/office/drawing/2014/main" id="{2921F789-8030-4A78-BDC2-1D3C58C89160}"/>
               </a:ext>
             </a:extLst>
           </p:cNvPr>
@@ -12635,7 +12643,7 @@
           <p:cNvPr id="18" name="">
             <a:extLst xmlns:a="http://schemas.openxmlformats.org/drawingml/2006/main">
               <a:ext uri="{FF2B5EF4-FFF2-40B4-BE49-F238E27FC236}">
-                <a16:creationId xmlns:a16="http://schemas.microsoft.com/office/drawing/2014/main" id="{F1F3A494-0B1A-4D9A-9303-67D2B12C969B}"/>
+                <a16:creationId xmlns:a16="http://schemas.microsoft.com/office/drawing/2014/main" id="{7BC71B60-485D-4785-BBF3-0AA42D3ED742}"/>
               </a:ext>
             </a:extLst>
           </p:cNvPr>
@@ -12669,7 +12677,7 @@
           <p:cNvPr id="19" name="">
             <a:extLst xmlns:a="http://schemas.openxmlformats.org/drawingml/2006/main">
               <a:ext uri="{FF2B5EF4-FFF2-40B4-BE49-F238E27FC236}">
-                <a16:creationId xmlns:a16="http://schemas.microsoft.com/office/drawing/2014/main" id="{F5C5F4A2-E441-432F-9254-66542008B536}"/>
+                <a16:creationId xmlns:a16="http://schemas.microsoft.com/office/drawing/2014/main" id="{310C8F0D-3F0C-4A71-B04A-B568EDCEC2DC}"/>
               </a:ext>
             </a:extLst>
           </p:cNvPr>
@@ -12701,7 +12709,7 @@
           <p:cNvPr id="20" name="">
             <a:extLst xmlns:a="http://schemas.openxmlformats.org/drawingml/2006/main">
               <a:ext uri="{FF2B5EF4-FFF2-40B4-BE49-F238E27FC236}">
-                <a16:creationId xmlns:a16="http://schemas.microsoft.com/office/drawing/2014/main" id="{C142A324-D21C-4A77-8293-CE3F836C1FBA}"/>
+                <a16:creationId xmlns:a16="http://schemas.microsoft.com/office/drawing/2014/main" id="{5B112A69-48F2-4B1D-A2CA-08583C407803}"/>
               </a:ext>
             </a:extLst>
           </p:cNvPr>
@@ -12758,7 +12766,7 @@
           <p:cNvPr id="21" name="">
             <a:extLst xmlns:a="http://schemas.openxmlformats.org/drawingml/2006/main">
               <a:ext uri="{FF2B5EF4-FFF2-40B4-BE49-F238E27FC236}">
-                <a16:creationId xmlns:a16="http://schemas.microsoft.com/office/drawing/2014/main" id="{AA37F640-EC04-4028-81AF-33FFDD3CA04F}"/>
+                <a16:creationId xmlns:a16="http://schemas.microsoft.com/office/drawing/2014/main" id="{AC5D33AA-B80B-4592-BC17-4E3390A2E4F0}"/>
               </a:ext>
             </a:extLst>
           </p:cNvPr>
@@ -12815,7 +12823,7 @@
           <p:cNvPr id="22" name="">
             <a:extLst xmlns:a="http://schemas.openxmlformats.org/drawingml/2006/main">
               <a:ext uri="{FF2B5EF4-FFF2-40B4-BE49-F238E27FC236}">
-                <a16:creationId xmlns:a16="http://schemas.microsoft.com/office/drawing/2014/main" id="{194578AC-8434-4829-8F7A-134923AA3EAA}"/>
+                <a16:creationId xmlns:a16="http://schemas.microsoft.com/office/drawing/2014/main" id="{674F7762-4418-4219-B5C2-50A24E01D1AE}"/>
               </a:ext>
             </a:extLst>
           </p:cNvPr>
@@ -12870,7 +12878,7 @@
     </p:spTree>
     <p:extLst>
       <p:ext uri="{BB962C8B-B14F-4D97-AF65-F5344CB8AC3E}">
-        <p14:creationId xmlns:p14="http://schemas.microsoft.com/office/powerpoint/2010/main" val="293265196"/>
+        <p14:creationId xmlns:p14="http://schemas.microsoft.com/office/powerpoint/2010/main" val="1609415257"/>
       </p:ext>
     </p:extLst>
   </p:cSld>
@@ -13071,7 +13079,7 @@
           <p:cNvPr id="22" name="">
             <a:extLst xmlns:a="http://schemas.openxmlformats.org/drawingml/2006/main">
               <a:ext uri="{FF2B5EF4-FFF2-40B4-BE49-F238E27FC236}">
-                <a16:creationId xmlns:a16="http://schemas.microsoft.com/office/drawing/2014/main" id="{5A0AD8CC-9A8A-48FF-9E27-697368CAFF7D}"/>
+                <a16:creationId xmlns:a16="http://schemas.microsoft.com/office/drawing/2014/main" id="{02FCA36C-398B-4A91-A7A8-AC4B61D07E8A}"/>
               </a:ext>
             </a:extLst>
           </p:cNvPr>
@@ -13103,7 +13111,7 @@
           <p:cNvPr id="2" name="">
             <a:extLst xmlns:a="http://schemas.openxmlformats.org/drawingml/2006/main">
               <a:ext uri="{FF2B5EF4-FFF2-40B4-BE49-F238E27FC236}">
-                <a16:creationId xmlns:a16="http://schemas.microsoft.com/office/drawing/2014/main" id="{956751B8-F9EC-4706-AC57-1EE99842BF5E}"/>
+                <a16:creationId xmlns:a16="http://schemas.microsoft.com/office/drawing/2014/main" id="{CCABACD2-D3E4-4EDE-8618-A2C764B7DD2E}"/>
               </a:ext>
             </a:extLst>
           </p:cNvPr>
@@ -13160,7 +13168,7 @@
           <p:cNvPr id="3" name="">
             <a:extLst xmlns:a="http://schemas.openxmlformats.org/drawingml/2006/main">
               <a:ext uri="{FF2B5EF4-FFF2-40B4-BE49-F238E27FC236}">
-                <a16:creationId xmlns:a16="http://schemas.microsoft.com/office/drawing/2014/main" id="{1DB19D42-EA8A-48EC-82D0-B85F13DF023F}"/>
+                <a16:creationId xmlns:a16="http://schemas.microsoft.com/office/drawing/2014/main" id="{94E72B5B-352E-4DF8-B8DA-EC6B5F16EE28}"/>
               </a:ext>
             </a:extLst>
           </p:cNvPr>
@@ -13192,7 +13200,7 @@
           <p:cNvPr id="4" name="">
             <a:extLst xmlns:a="http://schemas.openxmlformats.org/drawingml/2006/main">
               <a:ext uri="{FF2B5EF4-FFF2-40B4-BE49-F238E27FC236}">
-                <a16:creationId xmlns:a16="http://schemas.microsoft.com/office/drawing/2014/main" id="{4D36AC01-A287-4B62-B00D-2BBF5B36FF36}"/>
+                <a16:creationId xmlns:a16="http://schemas.microsoft.com/office/drawing/2014/main" id="{A273FE94-341D-4BA7-99E5-0443AC0607B0}"/>
               </a:ext>
             </a:extLst>
           </p:cNvPr>
@@ -13249,7 +13257,7 @@
           <p:cNvPr id="5" name="">
             <a:extLst xmlns:a="http://schemas.openxmlformats.org/drawingml/2006/main">
               <a:ext uri="{FF2B5EF4-FFF2-40B4-BE49-F238E27FC236}">
-                <a16:creationId xmlns:a16="http://schemas.microsoft.com/office/drawing/2014/main" id="{F8A9CD34-5834-4EDA-B4AA-5CE0FA406E25}"/>
+                <a16:creationId xmlns:a16="http://schemas.microsoft.com/office/drawing/2014/main" id="{B81D7AEE-443D-44ED-9C87-D51FB32D59A5}"/>
               </a:ext>
             </a:extLst>
           </p:cNvPr>
@@ -13306,7 +13314,7 @@
           <p:cNvPr id="6" name="">
             <a:extLst xmlns:a="http://schemas.openxmlformats.org/drawingml/2006/main">
               <a:ext uri="{FF2B5EF4-FFF2-40B4-BE49-F238E27FC236}">
-                <a16:creationId xmlns:a16="http://schemas.microsoft.com/office/drawing/2014/main" id="{C07781DF-F882-46D6-82D9-FA0F4C6A601B}"/>
+                <a16:creationId xmlns:a16="http://schemas.microsoft.com/office/drawing/2014/main" id="{7109C58B-1FB6-4665-B4BC-620076063F56}"/>
               </a:ext>
             </a:extLst>
           </p:cNvPr>
@@ -13363,7 +13371,7 @@
           <p:cNvPr id="7" name="">
             <a:extLst xmlns:a="http://schemas.openxmlformats.org/drawingml/2006/main">
               <a:ext uri="{FF2B5EF4-FFF2-40B4-BE49-F238E27FC236}">
-                <a16:creationId xmlns:a16="http://schemas.microsoft.com/office/drawing/2014/main" id="{FEE8F7DB-6F79-422D-ACA7-5A0A773D9D0D}"/>
+                <a16:creationId xmlns:a16="http://schemas.microsoft.com/office/drawing/2014/main" id="{949AE801-D9E5-4138-9135-F9C24586055A}"/>
               </a:ext>
             </a:extLst>
           </p:cNvPr>
@@ -13395,7 +13403,7 @@
           <p:cNvPr id="8" name="">
             <a:extLst xmlns:a="http://schemas.openxmlformats.org/drawingml/2006/main">
               <a:ext uri="{FF2B5EF4-FFF2-40B4-BE49-F238E27FC236}">
-                <a16:creationId xmlns:a16="http://schemas.microsoft.com/office/drawing/2014/main" id="{968CEE42-14D4-4F9F-B7C0-B6CB9AE4343E}"/>
+                <a16:creationId xmlns:a16="http://schemas.microsoft.com/office/drawing/2014/main" id="{B6B4151F-2E13-4903-93EB-A871913CB644}"/>
               </a:ext>
             </a:extLst>
           </p:cNvPr>
@@ -13452,7 +13460,7 @@
           <p:cNvPr id="9" name="">
             <a:extLst xmlns:a="http://schemas.openxmlformats.org/drawingml/2006/main">
               <a:ext uri="{FF2B5EF4-FFF2-40B4-BE49-F238E27FC236}">
-                <a16:creationId xmlns:a16="http://schemas.microsoft.com/office/drawing/2014/main" id="{57225182-1875-4C7F-8150-D2DF5AD75B6E}"/>
+                <a16:creationId xmlns:a16="http://schemas.microsoft.com/office/drawing/2014/main" id="{49822EB7-DC38-4415-B562-EA8B12E0A496}"/>
               </a:ext>
             </a:extLst>
           </p:cNvPr>
@@ -13509,7 +13517,7 @@
           <p:cNvPr id="10" name="">
             <a:extLst xmlns:a="http://schemas.openxmlformats.org/drawingml/2006/main">
               <a:ext uri="{FF2B5EF4-FFF2-40B4-BE49-F238E27FC236}">
-                <a16:creationId xmlns:a16="http://schemas.microsoft.com/office/drawing/2014/main" id="{7BEFD08D-98D5-45E9-A824-75D7171590FC}"/>
+                <a16:creationId xmlns:a16="http://schemas.microsoft.com/office/drawing/2014/main" id="{634AF029-6A32-4AA8-8C6C-22BE681BDEA8}"/>
               </a:ext>
             </a:extLst>
           </p:cNvPr>
@@ -13543,7 +13551,7 @@
           <p:cNvPr id="11" name="">
             <a:extLst xmlns:a="http://schemas.openxmlformats.org/drawingml/2006/main">
               <a:ext uri="{FF2B5EF4-FFF2-40B4-BE49-F238E27FC236}">
-                <a16:creationId xmlns:a16="http://schemas.microsoft.com/office/drawing/2014/main" id="{18568744-24F4-48FE-9311-4440127CF141}"/>
+                <a16:creationId xmlns:a16="http://schemas.microsoft.com/office/drawing/2014/main" id="{064ED146-B3FB-41FA-A038-CA44EA2FA260}"/>
               </a:ext>
             </a:extLst>
           </p:cNvPr>
@@ -13575,7 +13583,7 @@
           <p:cNvPr id="12" name="">
             <a:extLst xmlns:a="http://schemas.openxmlformats.org/drawingml/2006/main">
               <a:ext uri="{FF2B5EF4-FFF2-40B4-BE49-F238E27FC236}">
-                <a16:creationId xmlns:a16="http://schemas.microsoft.com/office/drawing/2014/main" id="{8D57A76A-7F35-4220-945B-3749AFF3DD2A}"/>
+                <a16:creationId xmlns:a16="http://schemas.microsoft.com/office/drawing/2014/main" id="{8B02DFCC-0BBE-430E-959C-226194924F86}"/>
               </a:ext>
             </a:extLst>
           </p:cNvPr>
@@ -13632,7 +13640,7 @@
           <p:cNvPr id="13" name="">
             <a:extLst xmlns:a="http://schemas.openxmlformats.org/drawingml/2006/main">
               <a:ext uri="{FF2B5EF4-FFF2-40B4-BE49-F238E27FC236}">
-                <a16:creationId xmlns:a16="http://schemas.microsoft.com/office/drawing/2014/main" id="{D3AC3C6B-5407-44A1-B638-B62C991E1CCB}"/>
+                <a16:creationId xmlns:a16="http://schemas.microsoft.com/office/drawing/2014/main" id="{B4F4D9EB-B2A1-40D1-97D0-DB078EB9191D}"/>
               </a:ext>
             </a:extLst>
           </p:cNvPr>
@@ -13689,7 +13697,7 @@
           <p:cNvPr id="14" name="">
             <a:extLst xmlns:a="http://schemas.openxmlformats.org/drawingml/2006/main">
               <a:ext uri="{FF2B5EF4-FFF2-40B4-BE49-F238E27FC236}">
-                <a16:creationId xmlns:a16="http://schemas.microsoft.com/office/drawing/2014/main" id="{2CEF7704-1718-4ED5-8EA4-B8F86EAA3119}"/>
+                <a16:creationId xmlns:a16="http://schemas.microsoft.com/office/drawing/2014/main" id="{18FE481E-5CE6-4860-9040-4B6EA4BCA008}"/>
               </a:ext>
             </a:extLst>
           </p:cNvPr>
@@ -13723,7 +13731,7 @@
           <p:cNvPr id="15" name="">
             <a:extLst xmlns:a="http://schemas.openxmlformats.org/drawingml/2006/main">
               <a:ext uri="{FF2B5EF4-FFF2-40B4-BE49-F238E27FC236}">
-                <a16:creationId xmlns:a16="http://schemas.microsoft.com/office/drawing/2014/main" id="{C0460071-D2AF-463E-9541-79A20C955259}"/>
+                <a16:creationId xmlns:a16="http://schemas.microsoft.com/office/drawing/2014/main" id="{D5262AB2-F308-40FE-8729-E4406D0E26AB}"/>
               </a:ext>
             </a:extLst>
           </p:cNvPr>
@@ -13755,7 +13763,7 @@
           <p:cNvPr id="16" name="">
             <a:extLst xmlns:a="http://schemas.openxmlformats.org/drawingml/2006/main">
               <a:ext uri="{FF2B5EF4-FFF2-40B4-BE49-F238E27FC236}">
-                <a16:creationId xmlns:a16="http://schemas.microsoft.com/office/drawing/2014/main" id="{F424165A-EA19-40C7-980D-F5595EEAD8B8}"/>
+                <a16:creationId xmlns:a16="http://schemas.microsoft.com/office/drawing/2014/main" id="{4650DC31-8381-4FB9-A200-717151D15E58}"/>
               </a:ext>
             </a:extLst>
           </p:cNvPr>
@@ -13812,7 +13820,7 @@
           <p:cNvPr id="17" name="">
             <a:extLst xmlns:a="http://schemas.openxmlformats.org/drawingml/2006/main">
               <a:ext uri="{FF2B5EF4-FFF2-40B4-BE49-F238E27FC236}">
-                <a16:creationId xmlns:a16="http://schemas.microsoft.com/office/drawing/2014/main" id="{2ACA40CF-8CBF-4830-A46A-68F8766FD6B6}"/>
+                <a16:creationId xmlns:a16="http://schemas.microsoft.com/office/drawing/2014/main" id="{35E4BC4F-6841-4C22-A1DC-27EF8E9172CD}"/>
               </a:ext>
             </a:extLst>
           </p:cNvPr>
@@ -13869,7 +13877,7 @@
           <p:cNvPr id="18" name="">
             <a:extLst xmlns:a="http://schemas.openxmlformats.org/drawingml/2006/main">
               <a:ext uri="{FF2B5EF4-FFF2-40B4-BE49-F238E27FC236}">
-                <a16:creationId xmlns:a16="http://schemas.microsoft.com/office/drawing/2014/main" id="{B1A23C53-442C-4155-AE38-84D1A09A64E0}"/>
+                <a16:creationId xmlns:a16="http://schemas.microsoft.com/office/drawing/2014/main" id="{5E2CC3B0-9DFD-46A0-9ED0-47B474BA6B1F}"/>
               </a:ext>
             </a:extLst>
           </p:cNvPr>
@@ -13903,7 +13911,7 @@
           <p:cNvPr id="19" name="">
             <a:extLst xmlns:a="http://schemas.openxmlformats.org/drawingml/2006/main">
               <a:ext uri="{FF2B5EF4-FFF2-40B4-BE49-F238E27FC236}">
-                <a16:creationId xmlns:a16="http://schemas.microsoft.com/office/drawing/2014/main" id="{8FD1C09F-7F9E-46F7-A9EE-4CF4CAC46579}"/>
+                <a16:creationId xmlns:a16="http://schemas.microsoft.com/office/drawing/2014/main" id="{76D5A5E7-FC0D-4577-8A54-DA869E197DD7}"/>
               </a:ext>
             </a:extLst>
           </p:cNvPr>
@@ -13935,7 +13943,7 @@
           <p:cNvPr id="20" name="">
             <a:extLst xmlns:a="http://schemas.openxmlformats.org/drawingml/2006/main">
               <a:ext uri="{FF2B5EF4-FFF2-40B4-BE49-F238E27FC236}">
-                <a16:creationId xmlns:a16="http://schemas.microsoft.com/office/drawing/2014/main" id="{9D422D6F-7A0A-4673-8FD1-3F441983A08F}"/>
+                <a16:creationId xmlns:a16="http://schemas.microsoft.com/office/drawing/2014/main" id="{4CFC246A-1298-41E0-AEF0-5B16C0D99ECF}"/>
               </a:ext>
             </a:extLst>
           </p:cNvPr>
@@ -13992,7 +14000,7 @@
           <p:cNvPr id="21" name="">
             <a:extLst xmlns:a="http://schemas.openxmlformats.org/drawingml/2006/main">
               <a:ext uri="{FF2B5EF4-FFF2-40B4-BE49-F238E27FC236}">
-                <a16:creationId xmlns:a16="http://schemas.microsoft.com/office/drawing/2014/main" id="{1AE84118-B56E-46F4-B944-6A4CA4CAAB77}"/>
+                <a16:creationId xmlns:a16="http://schemas.microsoft.com/office/drawing/2014/main" id="{D733D81D-5AF4-4763-B86A-DAB14CC90E99}"/>
               </a:ext>
             </a:extLst>
           </p:cNvPr>
@@ -14047,7 +14055,7 @@
     </p:spTree>
     <p:extLst>
       <p:ext uri="{BB962C8B-B14F-4D97-AF65-F5344CB8AC3E}">
-        <p14:creationId xmlns:p14="http://schemas.microsoft.com/office/powerpoint/2010/main" val="276853772"/>
+        <p14:creationId xmlns:p14="http://schemas.microsoft.com/office/powerpoint/2010/main" val="1010331713"/>
       </p:ext>
     </p:extLst>
   </p:cSld>
